--- a/en/slides/08-Computer_Architecture-Boolean_Algebra_1-Code.pptx
+++ b/en/slides/08-Computer_Architecture-Boolean_Algebra_1-Code.pptx
@@ -126,23 +126,27 @@
   <p:extLst>
     <p:ext uri="{521415D9-36F7-43E2-AB2F-B90AF26B5E84}">
       <p14:sectionLst xmlns:p14="http://schemas.microsoft.com/office/powerpoint/2010/main">
-        <p14:section name="Opening" id="{224c31db-1809-4b3f-f93c-58082e272bf7}">
+        <p14:section name="Opening" id="{3e8fac85-6e9b-de89-5051-6a2a4b703ad1}">
           <p14:sldIdLst>
             <p14:sldId id="256"/>
             <p14:sldId id="257"/>
           </p14:sldIdLst>
         </p14:section>
-        <p14:section name="The listings" id="{bbebf60e-aab7-5014-ba49-5ebf7e9409ff}">
+        <p14:section name="Warm-up on the machine" id="{e74bb2cd-6fc3-2dc3-b710-285c2b5f624f}">
           <p14:sldIdLst>
             <p14:sldId id="258"/>
             <p14:sldId id="259"/>
+          </p14:sldIdLst>
+        </p14:section>
+        <p14:section name="Back to the machine" id="{ac613d94-8f17-b20d-f776-d224511c454a}">
+          <p14:sldIdLst>
             <p14:sldId id="260"/>
             <p14:sldId id="261"/>
             <p14:sldId id="262"/>
             <p14:sldId id="263"/>
           </p14:sldIdLst>
         </p14:section>
-        <p14:section name="The complete program" id="{c67b0e2a-7d8c-67cd-892d-007b88b45845}">
+        <p14:section name="The complete program" id="{64483381-3586-9b31-66e1-870ae791caff}">
           <p14:sldIdLst>
             <p14:sldId id="264"/>
             <p14:sldId id="265"/>
@@ -152,7 +156,7 @@
             <p14:sldId id="269"/>
           </p14:sldIdLst>
         </p14:section>
-        <p14:section name="Run it and test it" id="{13e88fe4-4f3c-3466-abfb-8ecab24b541e}">
+        <p14:section name="Run it and test it" id="{450d4479-1cd5-091a-41d8-02b93a0862b6}">
           <p14:sldIdLst>
             <p14:sldId id="270"/>
             <p14:sldId id="271"/>
@@ -161,7 +165,7 @@
             <p14:sldId id="274"/>
           </p14:sldIdLst>
         </p14:section>
-        <p14:section name="Exercises" id="{057f8e6a-7c91-f210-5fb7-8a9292d11cd5}">
+        <p14:section name="Exercises" id="{0abd20c5-9adc-f886-d749-ff4625e5d3dc}">
           <p14:sldIdLst>
             <p14:sldId id="275"/>
           </p14:sldIdLst>
@@ -3235,7 +3239,63 @@
       </p:sp>
       <p:sp>
         <p:nvSpPr>
-          <p:cNvPr id="11" name="Shape 9"/>
+          <p:cNvPr id="11" name="Text 9"/>
+          <p:cNvSpPr txBox="1"/>
+          <p:nvPr/>
+        </p:nvSpPr>
+        <p:spPr>
+          <a:xfrm>
+            <a:off x="4693615" y="566928"/>
+            <a:ext cx="6949440" cy="640080"/>
+          </a:xfrm>
+          <a:prstGeom prst="rect">
+            <a:avLst/>
+          </a:prstGeom>
+          <a:noFill/>
+          <a:ln/>
+        </p:spPr>
+        <p:txBody>
+          <a:bodyPr wrap="square" lIns="0" tIns="0" rIns="0" bIns="0" rtlCol="0" anchor="t"/>
+          <a:lstStyle/>
+          <a:p>
+            <a:pPr algn="r" indent="0" marL="0">
+              <a:buNone/>
+            </a:pPr>
+            <a:r>
+              <a:rPr lang="en-US" sz="1300" dirty="0">
+                <a:solidFill>
+                  <a:srgbClr val="CFE3EA"/>
+                </a:solidFill>
+                <a:latin typeface="Calibri" pitchFamily="34" charset="0"/>
+                <a:ea typeface="Calibri" pitchFamily="34" charset="-122"/>
+                <a:cs typeface="Calibri" pitchFamily="34" charset="-120"/>
+              </a:rPr>
+              <a:t>Code deck. The concepts, the figures and the questions are in the lecture deck:</a:t>
+            </a:r>
+            <a:endParaRPr lang="en-US" sz="1300" dirty="0"/>
+          </a:p>
+          <a:p>
+            <a:pPr algn="r" indent="0" marL="0">
+              <a:buNone/>
+            </a:pPr>
+            <a:r>
+              <a:rPr lang="en-US" sz="1300" dirty="0">
+                <a:solidFill>
+                  <a:srgbClr val="CFE3EA"/>
+                </a:solidFill>
+                <a:latin typeface="Calibri" pitchFamily="34" charset="0"/>
+                <a:ea typeface="Calibri" pitchFamily="34" charset="-122"/>
+                <a:cs typeface="Calibri" pitchFamily="34" charset="-120"/>
+              </a:rPr>
+              <a:t>08-Computer_Architecture-Boolean_Algebra_1.pptx</a:t>
+            </a:r>
+            <a:endParaRPr lang="en-US" sz="1300" dirty="0"/>
+          </a:p>
+        </p:txBody>
+      </p:sp>
+      <p:sp>
+        <p:nvSpPr>
+          <p:cNvPr id="12" name="Shape 10"/>
           <p:cNvSpPr/>
           <p:nvPr/>
         </p:nvSpPr>
@@ -3262,7 +3322,7 @@
       </p:sp>
       <p:pic>
         <p:nvPicPr>
-          <p:cNvPr id="12" name="Image 0" descr="/Users/raffaelemontella/devel/riscv-prg32/computer-architecture-with-prg32/tools/assets/lab2_step1_lamps.png">    </p:cNvPr>
+          <p:cNvPr id="13" name="Image 0" descr="/Users/raffaelemontella/devel/riscv-prg32/computer-architecture-with-prg32/tools/assets/lab2_step1_lamps.png">    </p:cNvPr>
           <p:cNvPicPr>
             <a:picLocks noChangeAspect="1"/>
           </p:cNvPicPr>

--- a/en/slides/08-Computer_Architecture-Boolean_Algebra_1-Code.pptx
+++ b/en/slides/08-Computer_Architecture-Boolean_Algebra_1-Code.pptx
@@ -126,19 +126,19 @@
   <p:extLst>
     <p:ext uri="{521415D9-36F7-43E2-AB2F-B90AF26B5E84}">
       <p14:sectionLst xmlns:p14="http://schemas.microsoft.com/office/powerpoint/2010/main">
-        <p14:section name="Opening" id="{3e8fac85-6e9b-de89-5051-6a2a4b703ad1}">
+        <p14:section name="Opening" id="{c2ce9b12-51e6-e9d6-1add-9ec4aa59c290}">
           <p14:sldIdLst>
             <p14:sldId id="256"/>
             <p14:sldId id="257"/>
           </p14:sldIdLst>
         </p14:section>
-        <p14:section name="Warm-up on the machine" id="{e74bb2cd-6fc3-2dc3-b710-285c2b5f624f}">
+        <p14:section name="Warm-up on the machine" id="{aae67c7f-d8ab-dcd5-3db9-6e0c6cfa0018}">
           <p14:sldIdLst>
             <p14:sldId id="258"/>
             <p14:sldId id="259"/>
           </p14:sldIdLst>
         </p14:section>
-        <p14:section name="Back to the machine" id="{ac613d94-8f17-b20d-f776-d224511c454a}">
+        <p14:section name="Back to the machine" id="{5bf92807-e7f0-0918-3a5f-7e920e0994a6}">
           <p14:sldIdLst>
             <p14:sldId id="260"/>
             <p14:sldId id="261"/>
@@ -146,7 +146,7 @@
             <p14:sldId id="263"/>
           </p14:sldIdLst>
         </p14:section>
-        <p14:section name="The complete program" id="{64483381-3586-9b31-66e1-870ae791caff}">
+        <p14:section name="The complete program" id="{06cce775-9674-bf1d-e9cd-bddefb46d3e1}">
           <p14:sldIdLst>
             <p14:sldId id="264"/>
             <p14:sldId id="265"/>
@@ -156,7 +156,7 @@
             <p14:sldId id="269"/>
           </p14:sldIdLst>
         </p14:section>
-        <p14:section name="Run it and test it" id="{450d4479-1cd5-091a-41d8-02b93a0862b6}">
+        <p14:section name="Run it and test it" id="{ffc048a3-154a-46d4-8a36-71e65218432d}">
           <p14:sldIdLst>
             <p14:sldId id="270"/>
             <p14:sldId id="271"/>
@@ -165,7 +165,7 @@
             <p14:sldId id="274"/>
           </p14:sldIdLst>
         </p14:section>
-        <p14:section name="Exercises" id="{0abd20c5-9adc-f886-d749-ff4625e5d3dc}">
+        <p14:section name="Exercises" id="{1f70bba9-9cc7-a9f0-df6a-b009b62ae31b}">
           <p14:sldIdLst>
             <p14:sldId id="275"/>
           </p14:sldIdLst>
@@ -574,7 +574,9 @@
           <a:p>
             <a:r>
               <a:rPr lang="en-US" dirty="0"/>
-              <a:t>This is the code deck of Lecture 08. The lecture deck holds the concepts; this one holds everything you type and run: the listings with their explanation, the complete program, what it shows, and the way to test it on each of the three hosts.</a:t>
+              <a:t>This is the code deck of Lecture 08. The lecture deck holds the concepts; this one holds everything you type and run: the listings with their explanation, the complete program, what it shows, and the way to test it on each of the three hosts.
+Learning status: UNDERSTAND NOW, by the end of this lecture you explain it, trace it and apply it on your own; USE NOW, you follow and use the recipe today; how it works inside is explained later, or is not part of the course; UNDERSTAND LATER, recognise the name and what it is for; a later lecture explains it. A slide without a badge is context: a story, an example, a question, an exercise.
+Learning status of this lecture. UNDERSTAND NOW: bit masks; the von Neumann architecture; analysis and synthesis; Boolean algebra; logic gates. USE NOW: the complete program, the PRG32 tools (used, not studied, in this course). UNDERSTAND LATER: minimisation, Karnaugh maps (Lecture 09). A slide without a badge is context: a story, an example, a question, an exercise.</a:t>
             </a:r>
             <a:endParaRPr lang="en-US" dirty="0"/>
           </a:p>
@@ -663,6 +665,7 @@
             <a:r>
               <a:rPr lang="en-US" dirty="0"/>
               <a:t>One page of the complete program, exactly as it is in the repository. Read it from the top: the header says what the program shows and how to build it; the three functions init, update and draw follow, then the data. Lines that you met in the listings of the lecture have the same comments here.
+USE NOW: the complete program (used, not studied, in this course).
 For the lecturer: code/l08.S, as built and run by the tests. The comments are part of the program: read them with the code.</a:t>
             </a:r>
             <a:endParaRPr lang="en-US" dirty="0"/>
@@ -752,6 +755,7 @@
             <a:r>
               <a:rPr lang="en-US" dirty="0"/>
               <a:t>One page of the complete program, exactly as it is in the repository. Read it from the top: the header says what the program shows and how to build it; the three functions init, update and draw follow, then the data. Lines that you met in the listings of the lecture have the same comments here.
+USE NOW: the complete program (used, not studied, in this course).
 For the lecturer: code/l08.S, as built and run by the tests. The comments are part of the program: read them with the code.</a:t>
             </a:r>
             <a:endParaRPr lang="en-US" dirty="0"/>
@@ -841,6 +845,7 @@
             <a:r>
               <a:rPr lang="en-US" dirty="0"/>
               <a:t>One page of the complete program, exactly as it is in the repository. Read it from the top: the header says what the program shows and how to build it; the three functions init, update and draw follow, then the data. Lines that you met in the listings of the lecture have the same comments here.
+USE NOW: the complete program (used, not studied, in this course).
 For the lecturer: code/l08.S, as built and run by the tests. The comments are part of the program: read them with the code.</a:t>
             </a:r>
             <a:endParaRPr lang="en-US" dirty="0"/>
@@ -930,6 +935,7 @@
             <a:r>
               <a:rPr lang="en-US" dirty="0"/>
               <a:t>One page of the complete program, exactly as it is in the repository. Read it from the top: the header says what the program shows and how to build it; the three functions init, update and draw follow, then the data. Lines that you met in the listings of the lecture have the same comments here.
+USE NOW: the complete program (used, not studied, in this course).
 For the lecturer: code/l08.S, as built and run by the tests. The comments are part of the program: read them with the code.</a:t>
             </a:r>
             <a:endParaRPr lang="en-US" dirty="0"/>
@@ -1019,6 +1025,7 @@
             <a:r>
               <a:rPr lang="en-US" dirty="0"/>
               <a:t>One page of the complete program, exactly as it is in the repository. Read it from the top: the header says what the program shows and how to build it; the three functions init, update and draw follow, then the data. Lines that you met in the listings of the lecture have the same comments here.
+USE NOW: the complete program (used, not studied, in this course).
 For the lecturer: code/l08.S, as built and run by the tests. The comments are part of the program: read them with the code.</a:t>
             </a:r>
             <a:endParaRPr lang="en-US" dirty="0"/>
@@ -1197,6 +1204,7 @@
             <a:r>
               <a:rPr lang="en-US" dirty="0"/>
               <a:t>The quickest way: PRG32-QT on your own computer. Four steps, each with its command. PRG32-QT behaves like a board on port 8080, which is why the upload command says esp32c6. With debug mode enabled you can stop at any instruction and read registers and memory.
+USE NOW: the PRG32 tools (used, not studied, in this course).
 For the lecturer: Run by the tests: the cartridge of this slide is built with this command and executed on the headless runner of PRG32-QT. Without the toolchain: import the .prg32 file in PRG32-QT and choose Run Cartridge. Keys: arrows or WASD for the joystick, Z or J for A, X or K for B, Enter for Start, Escape to go back to Setup.</a:t>
             </a:r>
             <a:endParaRPr lang="en-US" dirty="0"/>
@@ -1286,6 +1294,7 @@
             <a:r>
               <a:rPr lang="en-US" dirty="0"/>
               <a:t>The same program on the emulator. QEMU runs the real firmware on an emulated chip, so the cartridge must be built for the architecture qemu. Stage the cartridge while QEMU is closed. The firmware opens on the Setup menu: choose Run Cartridge and the slot. Remember that the keyboard is read by the terminal, not by the window with the picture.
+USE NOW: the PRG32 tools (used, not studied, in this course).
 For the lecturer: Checked by the tests up to the staging: the cartridge is built for the architecture qemu and accepted into the flash image of the emulator. What the emulator then shows is not checked automatically: Espressif QEMU needs its window. Since October 2026 the firmware starts on Setup: choose Run Cartridge, then cart0.</a:t>
             </a:r>
             <a:endParaRPr lang="en-US" dirty="0"/>
@@ -1375,6 +1384,7 @@
             <a:r>
               <a:rPr lang="en-US" dirty="0"/>
               <a:t>The same program on the kit. The firmware is written once, through USB; after that cartridges travel over Wi-Fi. The upload command is the one used for PRG32-QT with the address of the board. This is the only host that the automatic tests do not run: try it, and report what you see.
+USE NOW: the PRG32 tools (used, not studied, in this course).
 For the lecturer: Not run by the tests: there is no board on the test machine. The cartridge for the architecture esp32c6 is built by the tests; the steps are those of the PRG32 documentation. If the serial port is not found pass it explicitly. To use the Wi-Fi of the classroom: python3 -m prg32 wifi set --ssid NAME --password PASSWORD --mode sta.</a:t>
             </a:r>
             <a:endParaRPr lang="en-US" dirty="0"/>
@@ -1464,6 +1474,7 @@
             <a:r>
               <a:rPr lang="en-US" dirty="0"/>
               <a:t>The five most common symptoms, what each means, and what to do. Read the message before changing anything: it nearly always names the cause.
+USE NOW: the PRG32 tools (used, not studied, in this course).
 For the lecturer: The first three rows cover most cases. When asking for help, paste the command and the whole message as text. docs/usage/troubleshooting.md of the PRG32 repository has the complete list.</a:t>
             </a:r>
             <a:endParaRPr lang="en-US" dirty="0"/>
@@ -1731,6 +1742,7 @@
             <a:r>
               <a:rPr lang="en-US" dirty="0"/>
               <a:t>prg32_input_read returns all the buttons at once in a0, one bit per button. andi t3, t0, 0x01 keeps bit 0 and forces every other bit to zero; the result is different from zero exactly when LEFT is pressed, and beqz skips the movement otherwise. The same pattern, with 0x02, tests RIGHT. The constant used with andi is called a mask. The last callout asks the question of the lecture: andi is thirty-two AND gates working side by side, so what is an AND?
+UNDERSTAND NOW: bit masks.
 For the lecturer: From textbook chapter 6 (State and Input) and lab 06-asm-state-and-input. The constant used with andi is called a mask.</a:t>
             </a:r>
             <a:endParaRPr lang="en-US" dirty="0"/>
@@ -1820,6 +1832,7 @@
             <a:r>
               <a:rPr lang="en-US" dirty="0"/>
               <a:t>The value returned by the buttons is a word in which each bit has a meaning: bit 0 is LEFT, bit 1 RIGHT, bit 2 UP, bit 3 DOWN, bits 4 and 5 are A and B, bit 6 is START. If you hold RIGHT and A together you get 0x12, that is 0001 0010. In the picture each lamp is one bit of this word. Every question you can ask about the joystick, such as "is LEFT pressed but not RIGHT?", is a Boolean expression over these seven variables.
+UNDERSTAND NOW: bit masks.
 For the lecturer: Button constants from prg32.h (PRG32_BTN_*). Player two uses the same layout in higher bits.</a:t>
             </a:r>
             <a:endParaRPr lang="en-US" dirty="0"/>
@@ -1909,6 +1922,7 @@
             <a:r>
               <a:rPr lang="en-US" dirty="0"/>
               <a:t>and, or, xor and not apply one gate to every pair of corresponding bits of two registers, all positions at once. The third column works out an example on eight bits: with a equal to 1100 1010 and b equal to 0000 1111, AND gives 0000 1010, OR gives 1100 1111, XOR gives 1100 0101. The last column shows the same operators in C. not is a pseudo-instruction: it is xori with minus 1, because minus 1 in two's complement is all ones.
+UNDERSTAND NOW: bit masks.
 For the lecturer: Each instruction applies the same gate to all thirty-two pairs of bits at once (eight shown). The immediate forms andi, ori and xori take a 12-bit constant; not is the pseudo-instruction xori t0, a, -1, because -1 is all ones.</a:t>
             </a:r>
             <a:endParaRPr lang="en-US" dirty="0"/>
@@ -1998,6 +2012,7 @@
             <a:r>
               <a:rPr lang="en-US" dirty="0"/>
               <a:t>The four standard uses of a mask, each resting on a law of the algebra. To test a bit, AND with a mask that has 1 in that position: x AND 1 is x, x AND 0 is 0. To set it to 1, OR with the same mask. To clear it, AND with the complemented mask. To toggle it, XOR with the mask. In the last three cases the other bits are unchanged, and this is the whole point: a mask acts on the bits you choose and leaves the rest alone.
+UNDERSTAND NOW: bit masks.
 For the lecturer: The identity and null-element laws are exactly what makes a mask work: a 1 in the mask lets the bit through (AND) or forces it (OR); a 0 does the opposite. ~0x10 is 0xFFFFFFEF, which the assembler encodes as the immediate -17.</a:t>
             </a:r>
             <a:endParaRPr lang="en-US" dirty="0"/>
@@ -2087,6 +2102,7 @@
             <a:r>
               <a:rPr lang="en-US" dirty="0"/>
               <a:t>De Morgan in a program. The player is idle when neither LEFT nor RIGHT is pressed. The short version uses a mask with two bits, 0x03: the result is zero only if both bits are zero, that is NOT (LEFT OR RIGHT). The long version tests each button separately: (NOT LEFT) AND (NOT RIGHT). The second law of De Morgan says that the two are the same condition. Two instructions instead of five: simplifying an expression is useful in software as well as in hardware.
+UNDERSTAND NOW: bit masks.
 For the lecturer: (x + y)' = x' . y'. Two instructions instead of five: minimisation is not only for hardware.</a:t>
             </a:r>
             <a:endParaRPr lang="en-US" dirty="0"/>
@@ -2176,6 +2192,7 @@
             <a:r>
               <a:rPr lang="en-US" dirty="0"/>
               <a:t>How to read bit number n of a word when n is in a register: shift the word right by n positions, so that the bit you want arrives in position 0, then mask with 1. Here s0 holds the number of the lamp, srl shifts the button word, andi isolates the bit, and the colour is chosen accordingly: grey for off, yellow for on. Shift and mask is one of the most common idioms in low-level programming.
+UNDERSTAND NOW: bit masks.
 For the lecturer: Source: textbook lab 06-asm-state-and-input, step1_lamps.S (inside lamp_loop). srl is a logical shift right (Lecture 05).</a:t>
             </a:r>
             <a:endParaRPr lang="en-US" dirty="0"/>
@@ -2265,6 +2282,7 @@
             <a:r>
               <a:rPr lang="en-US" dirty="0"/>
               <a:t>One page of the complete program, exactly as it is in the repository. Read it from the top: the header says what the program shows and how to build it; the three functions init, update and draw follow, then the data. Lines that you met in the listings of the lecture have the same comments here.
+USE NOW: the complete program (used, not studied, in this course).
 For the lecturer: code/l08.S, as built and run by the tests. The comments are part of the program: read them with the code.</a:t>
             </a:r>
             <a:endParaRPr lang="en-US" dirty="0"/>
@@ -3346,6 +3364,420 @@
       </p:pic>
       <p:sp>
         <p:nvSpPr>
+          <p:cNvPr id="14" name="Shape 11"/>
+          <p:cNvSpPr/>
+          <p:nvPr/>
+        </p:nvSpPr>
+        <p:spPr>
+          <a:xfrm>
+            <a:off x="9690303" y="91440"/>
+            <a:ext cx="1952752" cy="274320"/>
+          </a:xfrm>
+          <a:prstGeom prst="rect">
+            <a:avLst/>
+          </a:prstGeom>
+          <a:solidFill>
+            <a:srgbClr val="F3E8FF"/>
+          </a:solidFill>
+          <a:ln w="12700">
+            <a:solidFill>
+              <a:srgbClr val="7E22CE"/>
+            </a:solidFill>
+            <a:prstDash val="dash"/>
+          </a:ln>
+        </p:spPr>
+      </p:sp>
+      <p:sp>
+        <p:nvSpPr>
+          <p:cNvPr id="15" name="Shape 12"/>
+          <p:cNvSpPr/>
+          <p:nvPr/>
+        </p:nvSpPr>
+        <p:spPr>
+          <a:xfrm>
+            <a:off x="9717735" y="128016"/>
+            <a:ext cx="45720" cy="45720"/>
+          </a:xfrm>
+          <a:prstGeom prst="rect">
+            <a:avLst/>
+          </a:prstGeom>
+          <a:solidFill>
+            <a:srgbClr val="7E22CE"/>
+          </a:solidFill>
+          <a:ln w="12700">
+            <a:solidFill>
+              <a:srgbClr val="7E22CE"/>
+            </a:solidFill>
+            <a:prstDash val="solid"/>
+          </a:ln>
+        </p:spPr>
+      </p:sp>
+      <p:sp>
+        <p:nvSpPr>
+          <p:cNvPr id="16" name="Shape 13"/>
+          <p:cNvSpPr/>
+          <p:nvPr/>
+        </p:nvSpPr>
+        <p:spPr>
+          <a:xfrm>
+            <a:off x="9717735" y="205740"/>
+            <a:ext cx="45720" cy="45720"/>
+          </a:xfrm>
+          <a:prstGeom prst="rect">
+            <a:avLst/>
+          </a:prstGeom>
+          <a:solidFill>
+            <a:srgbClr val="7E22CE"/>
+          </a:solidFill>
+          <a:ln w="12700">
+            <a:solidFill>
+              <a:srgbClr val="7E22CE"/>
+            </a:solidFill>
+            <a:prstDash val="solid"/>
+          </a:ln>
+        </p:spPr>
+      </p:sp>
+      <p:sp>
+        <p:nvSpPr>
+          <p:cNvPr id="17" name="Shape 14"/>
+          <p:cNvSpPr/>
+          <p:nvPr/>
+        </p:nvSpPr>
+        <p:spPr>
+          <a:xfrm>
+            <a:off x="9717735" y="283464"/>
+            <a:ext cx="45720" cy="45720"/>
+          </a:xfrm>
+          <a:prstGeom prst="rect">
+            <a:avLst/>
+          </a:prstGeom>
+          <a:solidFill>
+            <a:srgbClr val="7E22CE"/>
+          </a:solidFill>
+          <a:ln w="12700">
+            <a:solidFill>
+              <a:srgbClr val="7E22CE"/>
+            </a:solidFill>
+            <a:prstDash val="solid"/>
+          </a:ln>
+        </p:spPr>
+      </p:sp>
+      <p:pic>
+        <p:nvPicPr>
+          <p:cNvPr id="18" name="Image 1" descr="preencoded.png">    </p:cNvPr>
+          <p:cNvPicPr>
+            <a:picLocks noChangeAspect="1"/>
+          </p:cNvPicPr>
+          <p:nvPr/>
+        </p:nvPicPr>
+        <p:blipFill>
+          <a:blip r:embed="rId2"/>
+          <a:stretch>
+            <a:fillRect/>
+          </a:stretch>
+        </p:blipFill>
+        <p:spPr>
+          <a:xfrm>
+            <a:off x="9818319" y="128016"/>
+            <a:ext cx="201168" cy="201168"/>
+          </a:xfrm>
+          <a:prstGeom prst="rect">
+            <a:avLst/>
+          </a:prstGeom>
+        </p:spPr>
+      </p:pic>
+      <p:sp>
+        <p:nvSpPr>
+          <p:cNvPr id="19" name="Text 15"/>
+          <p:cNvSpPr txBox="1"/>
+          <p:nvPr/>
+        </p:nvSpPr>
+        <p:spPr>
+          <a:xfrm>
+            <a:off x="10074351" y="91440"/>
+            <a:ext cx="1532128" cy="274320"/>
+          </a:xfrm>
+          <a:prstGeom prst="rect">
+            <a:avLst/>
+          </a:prstGeom>
+          <a:noFill/>
+          <a:ln/>
+        </p:spPr>
+        <p:txBody>
+          <a:bodyPr wrap="square" lIns="0" tIns="0" rIns="0" bIns="0" rtlCol="0" anchor="ctr"/>
+          <a:lstStyle/>
+          <a:p>
+            <a:pPr indent="0" marL="0">
+              <a:buNone/>
+            </a:pPr>
+            <a:r>
+              <a:rPr lang="en-US" sz="1100" b="1" dirty="0">
+                <a:solidFill>
+                  <a:srgbClr val="6B21A8"/>
+                </a:solidFill>
+                <a:latin typeface="Calibri" pitchFamily="34" charset="0"/>
+                <a:ea typeface="Calibri" pitchFamily="34" charset="-122"/>
+                <a:cs typeface="Calibri" pitchFamily="34" charset="-120"/>
+              </a:rPr>
+              <a:t>UNDERSTAND LATER</a:t>
+            </a:r>
+            <a:endParaRPr lang="en-US" sz="1100" dirty="0"/>
+          </a:p>
+        </p:txBody>
+      </p:sp>
+      <p:sp>
+        <p:nvSpPr>
+          <p:cNvPr id="20" name="Shape 16"/>
+          <p:cNvSpPr/>
+          <p:nvPr/>
+        </p:nvSpPr>
+        <p:spPr>
+          <a:xfrm>
+            <a:off x="8407349" y="91440"/>
+            <a:ext cx="1173226" cy="274320"/>
+          </a:xfrm>
+          <a:prstGeom prst="rect">
+            <a:avLst/>
+          </a:prstGeom>
+          <a:solidFill>
+            <a:srgbClr val="FEF3C7"/>
+          </a:solidFill>
+          <a:ln w="12700">
+            <a:solidFill>
+              <a:srgbClr val="B45309"/>
+            </a:solidFill>
+            <a:prstDash val="solid"/>
+          </a:ln>
+        </p:spPr>
+      </p:sp>
+      <p:sp>
+        <p:nvSpPr>
+          <p:cNvPr id="21" name="Shape 17"/>
+          <p:cNvSpPr/>
+          <p:nvPr/>
+        </p:nvSpPr>
+        <p:spPr>
+          <a:xfrm>
+            <a:off x="8407349" y="91440"/>
+            <a:ext cx="27432" cy="274320"/>
+          </a:xfrm>
+          <a:prstGeom prst="rect">
+            <a:avLst/>
+          </a:prstGeom>
+          <a:solidFill>
+            <a:srgbClr val="B45309"/>
+          </a:solidFill>
+          <a:ln w="12700">
+            <a:solidFill>
+              <a:srgbClr val="B45309"/>
+            </a:solidFill>
+            <a:prstDash val="solid"/>
+          </a:ln>
+        </p:spPr>
+      </p:sp>
+      <p:sp>
+        <p:nvSpPr>
+          <p:cNvPr id="22" name="Shape 18"/>
+          <p:cNvSpPr/>
+          <p:nvPr/>
+        </p:nvSpPr>
+        <p:spPr>
+          <a:xfrm>
+            <a:off x="8462213" y="91440"/>
+            <a:ext cx="27432" cy="274320"/>
+          </a:xfrm>
+          <a:prstGeom prst="rect">
+            <a:avLst/>
+          </a:prstGeom>
+          <a:solidFill>
+            <a:srgbClr val="B45309"/>
+          </a:solidFill>
+          <a:ln w="12700">
+            <a:solidFill>
+              <a:srgbClr val="B45309"/>
+            </a:solidFill>
+            <a:prstDash val="solid"/>
+          </a:ln>
+        </p:spPr>
+      </p:sp>
+      <p:pic>
+        <p:nvPicPr>
+          <p:cNvPr id="23" name="Image 2" descr="preencoded.png">    </p:cNvPr>
+          <p:cNvPicPr>
+            <a:picLocks noChangeAspect="1"/>
+          </p:cNvPicPr>
+          <p:nvPr/>
+        </p:nvPicPr>
+        <p:blipFill>
+          <a:blip r:embed="rId3"/>
+          <a:stretch>
+            <a:fillRect/>
+          </a:stretch>
+        </p:blipFill>
+        <p:spPr>
+          <a:xfrm>
+            <a:off x="8535365" y="128016"/>
+            <a:ext cx="201168" cy="201168"/>
+          </a:xfrm>
+          <a:prstGeom prst="rect">
+            <a:avLst/>
+          </a:prstGeom>
+        </p:spPr>
+      </p:pic>
+      <p:sp>
+        <p:nvSpPr>
+          <p:cNvPr id="24" name="Text 19"/>
+          <p:cNvSpPr txBox="1"/>
+          <p:nvPr/>
+        </p:nvSpPr>
+        <p:spPr>
+          <a:xfrm>
+            <a:off x="8791397" y="91440"/>
+            <a:ext cx="752602" cy="274320"/>
+          </a:xfrm>
+          <a:prstGeom prst="rect">
+            <a:avLst/>
+          </a:prstGeom>
+          <a:noFill/>
+          <a:ln/>
+        </p:spPr>
+        <p:txBody>
+          <a:bodyPr wrap="square" lIns="0" tIns="0" rIns="0" bIns="0" rtlCol="0" anchor="ctr"/>
+          <a:lstStyle/>
+          <a:p>
+            <a:pPr indent="0" marL="0">
+              <a:buNone/>
+            </a:pPr>
+            <a:r>
+              <a:rPr lang="en-US" sz="1100" b="1" dirty="0">
+                <a:solidFill>
+                  <a:srgbClr val="92400E"/>
+                </a:solidFill>
+                <a:latin typeface="Calibri" pitchFamily="34" charset="0"/>
+                <a:ea typeface="Calibri" pitchFamily="34" charset="-122"/>
+                <a:cs typeface="Calibri" pitchFamily="34" charset="-120"/>
+              </a:rPr>
+              <a:t>USE NOW</a:t>
+            </a:r>
+            <a:endParaRPr lang="en-US" sz="1100" dirty="0"/>
+          </a:p>
+        </p:txBody>
+      </p:sp>
+      <p:sp>
+        <p:nvSpPr>
+          <p:cNvPr id="25" name="Shape 20"/>
+          <p:cNvSpPr/>
+          <p:nvPr/>
+        </p:nvSpPr>
+        <p:spPr>
+          <a:xfrm>
+            <a:off x="6518097" y="91440"/>
+            <a:ext cx="1779524" cy="274320"/>
+          </a:xfrm>
+          <a:prstGeom prst="rect">
+            <a:avLst/>
+          </a:prstGeom>
+          <a:solidFill>
+            <a:srgbClr val="E0F2FE"/>
+          </a:solidFill>
+          <a:ln w="12700">
+            <a:solidFill>
+              <a:srgbClr val="0369A1"/>
+            </a:solidFill>
+            <a:prstDash val="solid"/>
+          </a:ln>
+        </p:spPr>
+      </p:sp>
+      <p:sp>
+        <p:nvSpPr>
+          <p:cNvPr id="26" name="Shape 21"/>
+          <p:cNvSpPr/>
+          <p:nvPr/>
+        </p:nvSpPr>
+        <p:spPr>
+          <a:xfrm>
+            <a:off x="6518097" y="91440"/>
+            <a:ext cx="73152" cy="274320"/>
+          </a:xfrm>
+          <a:prstGeom prst="rect">
+            <a:avLst/>
+          </a:prstGeom>
+          <a:solidFill>
+            <a:srgbClr val="0369A1"/>
+          </a:solidFill>
+          <a:ln w="12700">
+            <a:solidFill>
+              <a:srgbClr val="0369A1"/>
+            </a:solidFill>
+            <a:prstDash val="solid"/>
+          </a:ln>
+        </p:spPr>
+      </p:sp>
+      <p:pic>
+        <p:nvPicPr>
+          <p:cNvPr id="27" name="Image 3" descr="preencoded.png">    </p:cNvPr>
+          <p:cNvPicPr>
+            <a:picLocks noChangeAspect="1"/>
+          </p:cNvPicPr>
+          <p:nvPr/>
+        </p:nvPicPr>
+        <p:blipFill>
+          <a:blip r:embed="rId4"/>
+          <a:stretch>
+            <a:fillRect/>
+          </a:stretch>
+        </p:blipFill>
+        <p:spPr>
+          <a:xfrm>
+            <a:off x="6646113" y="128016"/>
+            <a:ext cx="201168" cy="201168"/>
+          </a:xfrm>
+          <a:prstGeom prst="rect">
+            <a:avLst/>
+          </a:prstGeom>
+        </p:spPr>
+      </p:pic>
+      <p:sp>
+        <p:nvSpPr>
+          <p:cNvPr id="28" name="Text 22"/>
+          <p:cNvSpPr txBox="1"/>
+          <p:nvPr/>
+        </p:nvSpPr>
+        <p:spPr>
+          <a:xfrm>
+            <a:off x="6902145" y="91440"/>
+            <a:ext cx="1358900" cy="274320"/>
+          </a:xfrm>
+          <a:prstGeom prst="rect">
+            <a:avLst/>
+          </a:prstGeom>
+          <a:noFill/>
+          <a:ln/>
+        </p:spPr>
+        <p:txBody>
+          <a:bodyPr wrap="square" lIns="0" tIns="0" rIns="0" bIns="0" rtlCol="0" anchor="ctr"/>
+          <a:lstStyle/>
+          <a:p>
+            <a:pPr indent="0" marL="0">
+              <a:buNone/>
+            </a:pPr>
+            <a:r>
+              <a:rPr lang="en-US" sz="1100" b="1" dirty="0">
+                <a:solidFill>
+                  <a:srgbClr val="075985"/>
+                </a:solidFill>
+                <a:latin typeface="Calibri" pitchFamily="34" charset="0"/>
+                <a:ea typeface="Calibri" pitchFamily="34" charset="-122"/>
+                <a:cs typeface="Calibri" pitchFamily="34" charset="-120"/>
+              </a:rPr>
+              <a:t>UNDERSTAND NOW</a:t>
+            </a:r>
+            <a:endParaRPr lang="en-US" sz="1100" dirty="0"/>
+          </a:p>
+        </p:txBody>
+      </p:sp>
+      <p:sp>
+        <p:nvSpPr>
           <p:cNvPr id="25" name="Slide Number Placeholder 0"/>
           <p:cNvSpPr>
             <a:spLocks noGrp="1"/>
@@ -3995,6 +4427,158 @@
       </p:sp>
       <p:sp>
         <p:nvSpPr>
+          <p:cNvPr id="5" name="Shape 3"/>
+          <p:cNvSpPr/>
+          <p:nvPr/>
+        </p:nvSpPr>
+        <p:spPr>
+          <a:xfrm>
+            <a:off x="8959672" y="91440"/>
+            <a:ext cx="2683383" cy="274320"/>
+          </a:xfrm>
+          <a:prstGeom prst="rect">
+            <a:avLst/>
+          </a:prstGeom>
+          <a:solidFill>
+            <a:srgbClr val="FEF3C7"/>
+          </a:solidFill>
+          <a:ln w="12700">
+            <a:solidFill>
+              <a:srgbClr val="B45309"/>
+            </a:solidFill>
+            <a:prstDash val="solid"/>
+          </a:ln>
+        </p:spPr>
+      </p:sp>
+      <p:sp>
+        <p:nvSpPr>
+          <p:cNvPr id="6" name="Shape 4"/>
+          <p:cNvSpPr/>
+          <p:nvPr/>
+        </p:nvSpPr>
+        <p:spPr>
+          <a:xfrm>
+            <a:off x="8959672" y="91440"/>
+            <a:ext cx="27432" cy="274320"/>
+          </a:xfrm>
+          <a:prstGeom prst="rect">
+            <a:avLst/>
+          </a:prstGeom>
+          <a:solidFill>
+            <a:srgbClr val="B45309"/>
+          </a:solidFill>
+          <a:ln w="12700">
+            <a:solidFill>
+              <a:srgbClr val="B45309"/>
+            </a:solidFill>
+            <a:prstDash val="solid"/>
+          </a:ln>
+        </p:spPr>
+      </p:sp>
+      <p:sp>
+        <p:nvSpPr>
+          <p:cNvPr id="7" name="Shape 5"/>
+          <p:cNvSpPr/>
+          <p:nvPr/>
+        </p:nvSpPr>
+        <p:spPr>
+          <a:xfrm>
+            <a:off x="9014536" y="91440"/>
+            <a:ext cx="27432" cy="274320"/>
+          </a:xfrm>
+          <a:prstGeom prst="rect">
+            <a:avLst/>
+          </a:prstGeom>
+          <a:solidFill>
+            <a:srgbClr val="B45309"/>
+          </a:solidFill>
+          <a:ln w="12700">
+            <a:solidFill>
+              <a:srgbClr val="B45309"/>
+            </a:solidFill>
+            <a:prstDash val="solid"/>
+          </a:ln>
+        </p:spPr>
+      </p:sp>
+      <p:pic>
+        <p:nvPicPr>
+          <p:cNvPr id="8" name="Image 0" descr="preencoded.png">    </p:cNvPr>
+          <p:cNvPicPr>
+            <a:picLocks noChangeAspect="1"/>
+          </p:cNvPicPr>
+          <p:nvPr/>
+        </p:nvPicPr>
+        <p:blipFill>
+          <a:blip r:embed="rId1"/>
+          <a:stretch>
+            <a:fillRect/>
+          </a:stretch>
+        </p:blipFill>
+        <p:spPr>
+          <a:xfrm>
+            <a:off x="9087688" y="128016"/>
+            <a:ext cx="201168" cy="201168"/>
+          </a:xfrm>
+          <a:prstGeom prst="rect">
+            <a:avLst/>
+          </a:prstGeom>
+        </p:spPr>
+      </p:pic>
+      <p:sp>
+        <p:nvSpPr>
+          <p:cNvPr id="9" name="Text 6"/>
+          <p:cNvSpPr txBox="1"/>
+          <p:nvPr/>
+        </p:nvSpPr>
+        <p:spPr>
+          <a:xfrm>
+            <a:off x="9343720" y="91440"/>
+            <a:ext cx="2262759" cy="274320"/>
+          </a:xfrm>
+          <a:prstGeom prst="rect">
+            <a:avLst/>
+          </a:prstGeom>
+          <a:noFill/>
+          <a:ln/>
+        </p:spPr>
+        <p:txBody>
+          <a:bodyPr wrap="square" lIns="0" tIns="0" rIns="0" bIns="0" rtlCol="0" anchor="ctr"/>
+          <a:lstStyle/>
+          <a:p>
+            <a:pPr indent="0" marL="0">
+              <a:buNone/>
+            </a:pPr>
+            <a:r>
+              <a:rPr lang="en-US" sz="1100" b="1" dirty="0">
+                <a:solidFill>
+                  <a:srgbClr val="92400E"/>
+                </a:solidFill>
+                <a:latin typeface="Calibri" pitchFamily="34" charset="0"/>
+                <a:ea typeface="Calibri" pitchFamily="34" charset="-122"/>
+                <a:cs typeface="Calibri" pitchFamily="34" charset="-120"/>
+              </a:rPr>
+              <a:t>USE NOW</a:t>
+            </a:r>
+            <a:pPr indent="0" marL="0">
+              <a:buNone/>
+            </a:pPr>
+            <a:r>
+              <a:rPr lang="en-US" sz="1100" dirty="0">
+                <a:solidFill>
+                  <a:srgbClr val="92400E"/>
+                </a:solidFill>
+                <a:latin typeface="Calibri" pitchFamily="34" charset="0"/>
+                <a:ea typeface="Calibri" pitchFamily="34" charset="-122"/>
+                <a:cs typeface="Calibri" pitchFamily="34" charset="-120"/>
+              </a:rPr>
+              <a:t> · the complete program</a:t>
+            </a:r>
+            <a:endParaRPr lang="en-US" sz="1100" dirty="0"/>
+          </a:p>
+        </p:txBody>
+      </p:sp>
+      <p:sp>
+        <p:nvSpPr>
           <p:cNvPr id="25" name="Slide Number Placeholder 0"/>
           <p:cNvSpPr>
             <a:spLocks noGrp="1"/>
@@ -4384,6 +4968,158 @@
       </p:sp>
       <p:sp>
         <p:nvSpPr>
+          <p:cNvPr id="5" name="Shape 3"/>
+          <p:cNvSpPr/>
+          <p:nvPr/>
+        </p:nvSpPr>
+        <p:spPr>
+          <a:xfrm>
+            <a:off x="8959672" y="91440"/>
+            <a:ext cx="2683383" cy="274320"/>
+          </a:xfrm>
+          <a:prstGeom prst="rect">
+            <a:avLst/>
+          </a:prstGeom>
+          <a:solidFill>
+            <a:srgbClr val="FEF3C7"/>
+          </a:solidFill>
+          <a:ln w="12700">
+            <a:solidFill>
+              <a:srgbClr val="B45309"/>
+            </a:solidFill>
+            <a:prstDash val="solid"/>
+          </a:ln>
+        </p:spPr>
+      </p:sp>
+      <p:sp>
+        <p:nvSpPr>
+          <p:cNvPr id="6" name="Shape 4"/>
+          <p:cNvSpPr/>
+          <p:nvPr/>
+        </p:nvSpPr>
+        <p:spPr>
+          <a:xfrm>
+            <a:off x="8959672" y="91440"/>
+            <a:ext cx="27432" cy="274320"/>
+          </a:xfrm>
+          <a:prstGeom prst="rect">
+            <a:avLst/>
+          </a:prstGeom>
+          <a:solidFill>
+            <a:srgbClr val="B45309"/>
+          </a:solidFill>
+          <a:ln w="12700">
+            <a:solidFill>
+              <a:srgbClr val="B45309"/>
+            </a:solidFill>
+            <a:prstDash val="solid"/>
+          </a:ln>
+        </p:spPr>
+      </p:sp>
+      <p:sp>
+        <p:nvSpPr>
+          <p:cNvPr id="7" name="Shape 5"/>
+          <p:cNvSpPr/>
+          <p:nvPr/>
+        </p:nvSpPr>
+        <p:spPr>
+          <a:xfrm>
+            <a:off x="9014536" y="91440"/>
+            <a:ext cx="27432" cy="274320"/>
+          </a:xfrm>
+          <a:prstGeom prst="rect">
+            <a:avLst/>
+          </a:prstGeom>
+          <a:solidFill>
+            <a:srgbClr val="B45309"/>
+          </a:solidFill>
+          <a:ln w="12700">
+            <a:solidFill>
+              <a:srgbClr val="B45309"/>
+            </a:solidFill>
+            <a:prstDash val="solid"/>
+          </a:ln>
+        </p:spPr>
+      </p:sp>
+      <p:pic>
+        <p:nvPicPr>
+          <p:cNvPr id="8" name="Image 0" descr="preencoded.png">    </p:cNvPr>
+          <p:cNvPicPr>
+            <a:picLocks noChangeAspect="1"/>
+          </p:cNvPicPr>
+          <p:nvPr/>
+        </p:nvPicPr>
+        <p:blipFill>
+          <a:blip r:embed="rId1"/>
+          <a:stretch>
+            <a:fillRect/>
+          </a:stretch>
+        </p:blipFill>
+        <p:spPr>
+          <a:xfrm>
+            <a:off x="9087688" y="128016"/>
+            <a:ext cx="201168" cy="201168"/>
+          </a:xfrm>
+          <a:prstGeom prst="rect">
+            <a:avLst/>
+          </a:prstGeom>
+        </p:spPr>
+      </p:pic>
+      <p:sp>
+        <p:nvSpPr>
+          <p:cNvPr id="9" name="Text 6"/>
+          <p:cNvSpPr txBox="1"/>
+          <p:nvPr/>
+        </p:nvSpPr>
+        <p:spPr>
+          <a:xfrm>
+            <a:off x="9343720" y="91440"/>
+            <a:ext cx="2262759" cy="274320"/>
+          </a:xfrm>
+          <a:prstGeom prst="rect">
+            <a:avLst/>
+          </a:prstGeom>
+          <a:noFill/>
+          <a:ln/>
+        </p:spPr>
+        <p:txBody>
+          <a:bodyPr wrap="square" lIns="0" tIns="0" rIns="0" bIns="0" rtlCol="0" anchor="ctr"/>
+          <a:lstStyle/>
+          <a:p>
+            <a:pPr indent="0" marL="0">
+              <a:buNone/>
+            </a:pPr>
+            <a:r>
+              <a:rPr lang="en-US" sz="1100" b="1" dirty="0">
+                <a:solidFill>
+                  <a:srgbClr val="92400E"/>
+                </a:solidFill>
+                <a:latin typeface="Calibri" pitchFamily="34" charset="0"/>
+                <a:ea typeface="Calibri" pitchFamily="34" charset="-122"/>
+                <a:cs typeface="Calibri" pitchFamily="34" charset="-120"/>
+              </a:rPr>
+              <a:t>USE NOW</a:t>
+            </a:r>
+            <a:pPr indent="0" marL="0">
+              <a:buNone/>
+            </a:pPr>
+            <a:r>
+              <a:rPr lang="en-US" sz="1100" dirty="0">
+                <a:solidFill>
+                  <a:srgbClr val="92400E"/>
+                </a:solidFill>
+                <a:latin typeface="Calibri" pitchFamily="34" charset="0"/>
+                <a:ea typeface="Calibri" pitchFamily="34" charset="-122"/>
+                <a:cs typeface="Calibri" pitchFamily="34" charset="-120"/>
+              </a:rPr>
+              <a:t> · the complete program</a:t>
+            </a:r>
+            <a:endParaRPr lang="en-US" sz="1100" dirty="0"/>
+          </a:p>
+        </p:txBody>
+      </p:sp>
+      <p:sp>
+        <p:nvSpPr>
           <p:cNvPr id="25" name="Slide Number Placeholder 0"/>
           <p:cNvSpPr>
             <a:spLocks noGrp="1"/>
@@ -5036,6 +5772,158 @@
       </p:sp>
       <p:sp>
         <p:nvSpPr>
+          <p:cNvPr id="5" name="Shape 3"/>
+          <p:cNvSpPr/>
+          <p:nvPr/>
+        </p:nvSpPr>
+        <p:spPr>
+          <a:xfrm>
+            <a:off x="8959672" y="91440"/>
+            <a:ext cx="2683383" cy="274320"/>
+          </a:xfrm>
+          <a:prstGeom prst="rect">
+            <a:avLst/>
+          </a:prstGeom>
+          <a:solidFill>
+            <a:srgbClr val="FEF3C7"/>
+          </a:solidFill>
+          <a:ln w="12700">
+            <a:solidFill>
+              <a:srgbClr val="B45309"/>
+            </a:solidFill>
+            <a:prstDash val="solid"/>
+          </a:ln>
+        </p:spPr>
+      </p:sp>
+      <p:sp>
+        <p:nvSpPr>
+          <p:cNvPr id="6" name="Shape 4"/>
+          <p:cNvSpPr/>
+          <p:nvPr/>
+        </p:nvSpPr>
+        <p:spPr>
+          <a:xfrm>
+            <a:off x="8959672" y="91440"/>
+            <a:ext cx="27432" cy="274320"/>
+          </a:xfrm>
+          <a:prstGeom prst="rect">
+            <a:avLst/>
+          </a:prstGeom>
+          <a:solidFill>
+            <a:srgbClr val="B45309"/>
+          </a:solidFill>
+          <a:ln w="12700">
+            <a:solidFill>
+              <a:srgbClr val="B45309"/>
+            </a:solidFill>
+            <a:prstDash val="solid"/>
+          </a:ln>
+        </p:spPr>
+      </p:sp>
+      <p:sp>
+        <p:nvSpPr>
+          <p:cNvPr id="7" name="Shape 5"/>
+          <p:cNvSpPr/>
+          <p:nvPr/>
+        </p:nvSpPr>
+        <p:spPr>
+          <a:xfrm>
+            <a:off x="9014536" y="91440"/>
+            <a:ext cx="27432" cy="274320"/>
+          </a:xfrm>
+          <a:prstGeom prst="rect">
+            <a:avLst/>
+          </a:prstGeom>
+          <a:solidFill>
+            <a:srgbClr val="B45309"/>
+          </a:solidFill>
+          <a:ln w="12700">
+            <a:solidFill>
+              <a:srgbClr val="B45309"/>
+            </a:solidFill>
+            <a:prstDash val="solid"/>
+          </a:ln>
+        </p:spPr>
+      </p:sp>
+      <p:pic>
+        <p:nvPicPr>
+          <p:cNvPr id="8" name="Image 0" descr="preencoded.png">    </p:cNvPr>
+          <p:cNvPicPr>
+            <a:picLocks noChangeAspect="1"/>
+          </p:cNvPicPr>
+          <p:nvPr/>
+        </p:nvPicPr>
+        <p:blipFill>
+          <a:blip r:embed="rId1"/>
+          <a:stretch>
+            <a:fillRect/>
+          </a:stretch>
+        </p:blipFill>
+        <p:spPr>
+          <a:xfrm>
+            <a:off x="9087688" y="128016"/>
+            <a:ext cx="201168" cy="201168"/>
+          </a:xfrm>
+          <a:prstGeom prst="rect">
+            <a:avLst/>
+          </a:prstGeom>
+        </p:spPr>
+      </p:pic>
+      <p:sp>
+        <p:nvSpPr>
+          <p:cNvPr id="9" name="Text 6"/>
+          <p:cNvSpPr txBox="1"/>
+          <p:nvPr/>
+        </p:nvSpPr>
+        <p:spPr>
+          <a:xfrm>
+            <a:off x="9343720" y="91440"/>
+            <a:ext cx="2262759" cy="274320"/>
+          </a:xfrm>
+          <a:prstGeom prst="rect">
+            <a:avLst/>
+          </a:prstGeom>
+          <a:noFill/>
+          <a:ln/>
+        </p:spPr>
+        <p:txBody>
+          <a:bodyPr wrap="square" lIns="0" tIns="0" rIns="0" bIns="0" rtlCol="0" anchor="ctr"/>
+          <a:lstStyle/>
+          <a:p>
+            <a:pPr indent="0" marL="0">
+              <a:buNone/>
+            </a:pPr>
+            <a:r>
+              <a:rPr lang="en-US" sz="1100" b="1" dirty="0">
+                <a:solidFill>
+                  <a:srgbClr val="92400E"/>
+                </a:solidFill>
+                <a:latin typeface="Calibri" pitchFamily="34" charset="0"/>
+                <a:ea typeface="Calibri" pitchFamily="34" charset="-122"/>
+                <a:cs typeface="Calibri" pitchFamily="34" charset="-120"/>
+              </a:rPr>
+              <a:t>USE NOW</a:t>
+            </a:r>
+            <a:pPr indent="0" marL="0">
+              <a:buNone/>
+            </a:pPr>
+            <a:r>
+              <a:rPr lang="en-US" sz="1100" dirty="0">
+                <a:solidFill>
+                  <a:srgbClr val="92400E"/>
+                </a:solidFill>
+                <a:latin typeface="Calibri" pitchFamily="34" charset="0"/>
+                <a:ea typeface="Calibri" pitchFamily="34" charset="-122"/>
+                <a:cs typeface="Calibri" pitchFamily="34" charset="-120"/>
+              </a:rPr>
+              <a:t> · the complete program</a:t>
+            </a:r>
+            <a:endParaRPr lang="en-US" sz="1100" dirty="0"/>
+          </a:p>
+        </p:txBody>
+      </p:sp>
+      <p:sp>
+        <p:nvSpPr>
           <p:cNvPr id="25" name="Slide Number Placeholder 0"/>
           <p:cNvSpPr>
             <a:spLocks noGrp="1"/>
@@ -5601,6 +6489,158 @@
       </p:sp>
       <p:sp>
         <p:nvSpPr>
+          <p:cNvPr id="5" name="Shape 3"/>
+          <p:cNvSpPr/>
+          <p:nvPr/>
+        </p:nvSpPr>
+        <p:spPr>
+          <a:xfrm>
+            <a:off x="8959672" y="91440"/>
+            <a:ext cx="2683383" cy="274320"/>
+          </a:xfrm>
+          <a:prstGeom prst="rect">
+            <a:avLst/>
+          </a:prstGeom>
+          <a:solidFill>
+            <a:srgbClr val="FEF3C7"/>
+          </a:solidFill>
+          <a:ln w="12700">
+            <a:solidFill>
+              <a:srgbClr val="B45309"/>
+            </a:solidFill>
+            <a:prstDash val="solid"/>
+          </a:ln>
+        </p:spPr>
+      </p:sp>
+      <p:sp>
+        <p:nvSpPr>
+          <p:cNvPr id="6" name="Shape 4"/>
+          <p:cNvSpPr/>
+          <p:nvPr/>
+        </p:nvSpPr>
+        <p:spPr>
+          <a:xfrm>
+            <a:off x="8959672" y="91440"/>
+            <a:ext cx="27432" cy="274320"/>
+          </a:xfrm>
+          <a:prstGeom prst="rect">
+            <a:avLst/>
+          </a:prstGeom>
+          <a:solidFill>
+            <a:srgbClr val="B45309"/>
+          </a:solidFill>
+          <a:ln w="12700">
+            <a:solidFill>
+              <a:srgbClr val="B45309"/>
+            </a:solidFill>
+            <a:prstDash val="solid"/>
+          </a:ln>
+        </p:spPr>
+      </p:sp>
+      <p:sp>
+        <p:nvSpPr>
+          <p:cNvPr id="7" name="Shape 5"/>
+          <p:cNvSpPr/>
+          <p:nvPr/>
+        </p:nvSpPr>
+        <p:spPr>
+          <a:xfrm>
+            <a:off x="9014536" y="91440"/>
+            <a:ext cx="27432" cy="274320"/>
+          </a:xfrm>
+          <a:prstGeom prst="rect">
+            <a:avLst/>
+          </a:prstGeom>
+          <a:solidFill>
+            <a:srgbClr val="B45309"/>
+          </a:solidFill>
+          <a:ln w="12700">
+            <a:solidFill>
+              <a:srgbClr val="B45309"/>
+            </a:solidFill>
+            <a:prstDash val="solid"/>
+          </a:ln>
+        </p:spPr>
+      </p:sp>
+      <p:pic>
+        <p:nvPicPr>
+          <p:cNvPr id="8" name="Image 0" descr="preencoded.png">    </p:cNvPr>
+          <p:cNvPicPr>
+            <a:picLocks noChangeAspect="1"/>
+          </p:cNvPicPr>
+          <p:nvPr/>
+        </p:nvPicPr>
+        <p:blipFill>
+          <a:blip r:embed="rId1"/>
+          <a:stretch>
+            <a:fillRect/>
+          </a:stretch>
+        </p:blipFill>
+        <p:spPr>
+          <a:xfrm>
+            <a:off x="9087688" y="128016"/>
+            <a:ext cx="201168" cy="201168"/>
+          </a:xfrm>
+          <a:prstGeom prst="rect">
+            <a:avLst/>
+          </a:prstGeom>
+        </p:spPr>
+      </p:pic>
+      <p:sp>
+        <p:nvSpPr>
+          <p:cNvPr id="9" name="Text 6"/>
+          <p:cNvSpPr txBox="1"/>
+          <p:nvPr/>
+        </p:nvSpPr>
+        <p:spPr>
+          <a:xfrm>
+            <a:off x="9343720" y="91440"/>
+            <a:ext cx="2262759" cy="274320"/>
+          </a:xfrm>
+          <a:prstGeom prst="rect">
+            <a:avLst/>
+          </a:prstGeom>
+          <a:noFill/>
+          <a:ln/>
+        </p:spPr>
+        <p:txBody>
+          <a:bodyPr wrap="square" lIns="0" tIns="0" rIns="0" bIns="0" rtlCol="0" anchor="ctr"/>
+          <a:lstStyle/>
+          <a:p>
+            <a:pPr indent="0" marL="0">
+              <a:buNone/>
+            </a:pPr>
+            <a:r>
+              <a:rPr lang="en-US" sz="1100" b="1" dirty="0">
+                <a:solidFill>
+                  <a:srgbClr val="92400E"/>
+                </a:solidFill>
+                <a:latin typeface="Calibri" pitchFamily="34" charset="0"/>
+                <a:ea typeface="Calibri" pitchFamily="34" charset="-122"/>
+                <a:cs typeface="Calibri" pitchFamily="34" charset="-120"/>
+              </a:rPr>
+              <a:t>USE NOW</a:t>
+            </a:r>
+            <a:pPr indent="0" marL="0">
+              <a:buNone/>
+            </a:pPr>
+            <a:r>
+              <a:rPr lang="en-US" sz="1100" dirty="0">
+                <a:solidFill>
+                  <a:srgbClr val="92400E"/>
+                </a:solidFill>
+                <a:latin typeface="Calibri" pitchFamily="34" charset="0"/>
+                <a:ea typeface="Calibri" pitchFamily="34" charset="-122"/>
+                <a:cs typeface="Calibri" pitchFamily="34" charset="-120"/>
+              </a:rPr>
+              <a:t> · the complete program</a:t>
+            </a:r>
+            <a:endParaRPr lang="en-US" sz="1100" dirty="0"/>
+          </a:p>
+        </p:txBody>
+      </p:sp>
+      <p:sp>
+        <p:nvSpPr>
           <p:cNvPr id="25" name="Slide Number Placeholder 0"/>
           <p:cNvSpPr>
             <a:spLocks noGrp="1"/>
@@ -5832,6 +6872,158 @@
       </p:sp>
       <p:sp>
         <p:nvSpPr>
+          <p:cNvPr id="5" name="Shape 3"/>
+          <p:cNvSpPr/>
+          <p:nvPr/>
+        </p:nvSpPr>
+        <p:spPr>
+          <a:xfrm>
+            <a:off x="8959672" y="91440"/>
+            <a:ext cx="2683383" cy="274320"/>
+          </a:xfrm>
+          <a:prstGeom prst="rect">
+            <a:avLst/>
+          </a:prstGeom>
+          <a:solidFill>
+            <a:srgbClr val="FEF3C7"/>
+          </a:solidFill>
+          <a:ln w="12700">
+            <a:solidFill>
+              <a:srgbClr val="B45309"/>
+            </a:solidFill>
+            <a:prstDash val="solid"/>
+          </a:ln>
+        </p:spPr>
+      </p:sp>
+      <p:sp>
+        <p:nvSpPr>
+          <p:cNvPr id="6" name="Shape 4"/>
+          <p:cNvSpPr/>
+          <p:nvPr/>
+        </p:nvSpPr>
+        <p:spPr>
+          <a:xfrm>
+            <a:off x="8959672" y="91440"/>
+            <a:ext cx="27432" cy="274320"/>
+          </a:xfrm>
+          <a:prstGeom prst="rect">
+            <a:avLst/>
+          </a:prstGeom>
+          <a:solidFill>
+            <a:srgbClr val="B45309"/>
+          </a:solidFill>
+          <a:ln w="12700">
+            <a:solidFill>
+              <a:srgbClr val="B45309"/>
+            </a:solidFill>
+            <a:prstDash val="solid"/>
+          </a:ln>
+        </p:spPr>
+      </p:sp>
+      <p:sp>
+        <p:nvSpPr>
+          <p:cNvPr id="7" name="Shape 5"/>
+          <p:cNvSpPr/>
+          <p:nvPr/>
+        </p:nvSpPr>
+        <p:spPr>
+          <a:xfrm>
+            <a:off x="9014536" y="91440"/>
+            <a:ext cx="27432" cy="274320"/>
+          </a:xfrm>
+          <a:prstGeom prst="rect">
+            <a:avLst/>
+          </a:prstGeom>
+          <a:solidFill>
+            <a:srgbClr val="B45309"/>
+          </a:solidFill>
+          <a:ln w="12700">
+            <a:solidFill>
+              <a:srgbClr val="B45309"/>
+            </a:solidFill>
+            <a:prstDash val="solid"/>
+          </a:ln>
+        </p:spPr>
+      </p:sp>
+      <p:pic>
+        <p:nvPicPr>
+          <p:cNvPr id="8" name="Image 0" descr="preencoded.png">    </p:cNvPr>
+          <p:cNvPicPr>
+            <a:picLocks noChangeAspect="1"/>
+          </p:cNvPicPr>
+          <p:nvPr/>
+        </p:nvPicPr>
+        <p:blipFill>
+          <a:blip r:embed="rId1"/>
+          <a:stretch>
+            <a:fillRect/>
+          </a:stretch>
+        </p:blipFill>
+        <p:spPr>
+          <a:xfrm>
+            <a:off x="9087688" y="128016"/>
+            <a:ext cx="201168" cy="201168"/>
+          </a:xfrm>
+          <a:prstGeom prst="rect">
+            <a:avLst/>
+          </a:prstGeom>
+        </p:spPr>
+      </p:pic>
+      <p:sp>
+        <p:nvSpPr>
+          <p:cNvPr id="9" name="Text 6"/>
+          <p:cNvSpPr txBox="1"/>
+          <p:nvPr/>
+        </p:nvSpPr>
+        <p:spPr>
+          <a:xfrm>
+            <a:off x="9343720" y="91440"/>
+            <a:ext cx="2262759" cy="274320"/>
+          </a:xfrm>
+          <a:prstGeom prst="rect">
+            <a:avLst/>
+          </a:prstGeom>
+          <a:noFill/>
+          <a:ln/>
+        </p:spPr>
+        <p:txBody>
+          <a:bodyPr wrap="square" lIns="0" tIns="0" rIns="0" bIns="0" rtlCol="0" anchor="ctr"/>
+          <a:lstStyle/>
+          <a:p>
+            <a:pPr indent="0" marL="0">
+              <a:buNone/>
+            </a:pPr>
+            <a:r>
+              <a:rPr lang="en-US" sz="1100" b="1" dirty="0">
+                <a:solidFill>
+                  <a:srgbClr val="92400E"/>
+                </a:solidFill>
+                <a:latin typeface="Calibri" pitchFamily="34" charset="0"/>
+                <a:ea typeface="Calibri" pitchFamily="34" charset="-122"/>
+                <a:cs typeface="Calibri" pitchFamily="34" charset="-120"/>
+              </a:rPr>
+              <a:t>USE NOW</a:t>
+            </a:r>
+            <a:pPr indent="0" marL="0">
+              <a:buNone/>
+            </a:pPr>
+            <a:r>
+              <a:rPr lang="en-US" sz="1100" dirty="0">
+                <a:solidFill>
+                  <a:srgbClr val="92400E"/>
+                </a:solidFill>
+                <a:latin typeface="Calibri" pitchFamily="34" charset="0"/>
+                <a:ea typeface="Calibri" pitchFamily="34" charset="-122"/>
+                <a:cs typeface="Calibri" pitchFamily="34" charset="-120"/>
+              </a:rPr>
+              <a:t> · the complete program</a:t>
+            </a:r>
+            <a:endParaRPr lang="en-US" sz="1100" dirty="0"/>
+          </a:p>
+        </p:txBody>
+      </p:sp>
+      <p:sp>
+        <p:nvSpPr>
           <p:cNvPr id="25" name="Slide Number Placeholder 0"/>
           <p:cNvSpPr>
             <a:spLocks noGrp="1"/>
@@ -6985,6 +8177,158 @@
       </p:sp>
       <p:sp>
         <p:nvSpPr>
+          <p:cNvPr id="17" name="Shape 15"/>
+          <p:cNvSpPr/>
+          <p:nvPr/>
+        </p:nvSpPr>
+        <p:spPr>
+          <a:xfrm>
+            <a:off x="9287967" y="91440"/>
+            <a:ext cx="2355088" cy="274320"/>
+          </a:xfrm>
+          <a:prstGeom prst="rect">
+            <a:avLst/>
+          </a:prstGeom>
+          <a:solidFill>
+            <a:srgbClr val="FEF3C7"/>
+          </a:solidFill>
+          <a:ln w="12700">
+            <a:solidFill>
+              <a:srgbClr val="B45309"/>
+            </a:solidFill>
+            <a:prstDash val="solid"/>
+          </a:ln>
+        </p:spPr>
+      </p:sp>
+      <p:sp>
+        <p:nvSpPr>
+          <p:cNvPr id="18" name="Shape 16"/>
+          <p:cNvSpPr/>
+          <p:nvPr/>
+        </p:nvSpPr>
+        <p:spPr>
+          <a:xfrm>
+            <a:off x="9287967" y="91440"/>
+            <a:ext cx="27432" cy="274320"/>
+          </a:xfrm>
+          <a:prstGeom prst="rect">
+            <a:avLst/>
+          </a:prstGeom>
+          <a:solidFill>
+            <a:srgbClr val="B45309"/>
+          </a:solidFill>
+          <a:ln w="12700">
+            <a:solidFill>
+              <a:srgbClr val="B45309"/>
+            </a:solidFill>
+            <a:prstDash val="solid"/>
+          </a:ln>
+        </p:spPr>
+      </p:sp>
+      <p:sp>
+        <p:nvSpPr>
+          <p:cNvPr id="19" name="Shape 17"/>
+          <p:cNvSpPr/>
+          <p:nvPr/>
+        </p:nvSpPr>
+        <p:spPr>
+          <a:xfrm>
+            <a:off x="9342831" y="91440"/>
+            <a:ext cx="27432" cy="274320"/>
+          </a:xfrm>
+          <a:prstGeom prst="rect">
+            <a:avLst/>
+          </a:prstGeom>
+          <a:solidFill>
+            <a:srgbClr val="B45309"/>
+          </a:solidFill>
+          <a:ln w="12700">
+            <a:solidFill>
+              <a:srgbClr val="B45309"/>
+            </a:solidFill>
+            <a:prstDash val="solid"/>
+          </a:ln>
+        </p:spPr>
+      </p:sp>
+      <p:pic>
+        <p:nvPicPr>
+          <p:cNvPr id="20" name="Image 0" descr="preencoded.png">    </p:cNvPr>
+          <p:cNvPicPr>
+            <a:picLocks noChangeAspect="1"/>
+          </p:cNvPicPr>
+          <p:nvPr/>
+        </p:nvPicPr>
+        <p:blipFill>
+          <a:blip r:embed="rId1"/>
+          <a:stretch>
+            <a:fillRect/>
+          </a:stretch>
+        </p:blipFill>
+        <p:spPr>
+          <a:xfrm>
+            <a:off x="9415983" y="128016"/>
+            <a:ext cx="201168" cy="201168"/>
+          </a:xfrm>
+          <a:prstGeom prst="rect">
+            <a:avLst/>
+          </a:prstGeom>
+        </p:spPr>
+      </p:pic>
+      <p:sp>
+        <p:nvSpPr>
+          <p:cNvPr id="21" name="Text 18"/>
+          <p:cNvSpPr txBox="1"/>
+          <p:nvPr/>
+        </p:nvSpPr>
+        <p:spPr>
+          <a:xfrm>
+            <a:off x="9672015" y="91440"/>
+            <a:ext cx="1934464" cy="274320"/>
+          </a:xfrm>
+          <a:prstGeom prst="rect">
+            <a:avLst/>
+          </a:prstGeom>
+          <a:noFill/>
+          <a:ln/>
+        </p:spPr>
+        <p:txBody>
+          <a:bodyPr wrap="square" lIns="0" tIns="0" rIns="0" bIns="0" rtlCol="0" anchor="ctr"/>
+          <a:lstStyle/>
+          <a:p>
+            <a:pPr indent="0" marL="0">
+              <a:buNone/>
+            </a:pPr>
+            <a:r>
+              <a:rPr lang="en-US" sz="1100" b="1" dirty="0">
+                <a:solidFill>
+                  <a:srgbClr val="92400E"/>
+                </a:solidFill>
+                <a:latin typeface="Calibri" pitchFamily="34" charset="0"/>
+                <a:ea typeface="Calibri" pitchFamily="34" charset="-122"/>
+                <a:cs typeface="Calibri" pitchFamily="34" charset="-120"/>
+              </a:rPr>
+              <a:t>USE NOW</a:t>
+            </a:r>
+            <a:pPr indent="0" marL="0">
+              <a:buNone/>
+            </a:pPr>
+            <a:r>
+              <a:rPr lang="en-US" sz="1100" dirty="0">
+                <a:solidFill>
+                  <a:srgbClr val="92400E"/>
+                </a:solidFill>
+                <a:latin typeface="Calibri" pitchFamily="34" charset="0"/>
+                <a:ea typeface="Calibri" pitchFamily="34" charset="-122"/>
+                <a:cs typeface="Calibri" pitchFamily="34" charset="-120"/>
+              </a:rPr>
+              <a:t> · the PRG32 tools</a:t>
+            </a:r>
+            <a:endParaRPr lang="en-US" sz="1100" dirty="0"/>
+          </a:p>
+        </p:txBody>
+      </p:sp>
+      <p:sp>
+        <p:nvSpPr>
           <p:cNvPr id="25" name="Slide Number Placeholder 0"/>
           <p:cNvSpPr>
             <a:spLocks noGrp="1"/>
@@ -7821,6 +9165,158 @@
       </p:sp>
       <p:sp>
         <p:nvSpPr>
+          <p:cNvPr id="17" name="Shape 15"/>
+          <p:cNvSpPr/>
+          <p:nvPr/>
+        </p:nvSpPr>
+        <p:spPr>
+          <a:xfrm>
+            <a:off x="9287967" y="91440"/>
+            <a:ext cx="2355088" cy="274320"/>
+          </a:xfrm>
+          <a:prstGeom prst="rect">
+            <a:avLst/>
+          </a:prstGeom>
+          <a:solidFill>
+            <a:srgbClr val="FEF3C7"/>
+          </a:solidFill>
+          <a:ln w="12700">
+            <a:solidFill>
+              <a:srgbClr val="B45309"/>
+            </a:solidFill>
+            <a:prstDash val="solid"/>
+          </a:ln>
+        </p:spPr>
+      </p:sp>
+      <p:sp>
+        <p:nvSpPr>
+          <p:cNvPr id="18" name="Shape 16"/>
+          <p:cNvSpPr/>
+          <p:nvPr/>
+        </p:nvSpPr>
+        <p:spPr>
+          <a:xfrm>
+            <a:off x="9287967" y="91440"/>
+            <a:ext cx="27432" cy="274320"/>
+          </a:xfrm>
+          <a:prstGeom prst="rect">
+            <a:avLst/>
+          </a:prstGeom>
+          <a:solidFill>
+            <a:srgbClr val="B45309"/>
+          </a:solidFill>
+          <a:ln w="12700">
+            <a:solidFill>
+              <a:srgbClr val="B45309"/>
+            </a:solidFill>
+            <a:prstDash val="solid"/>
+          </a:ln>
+        </p:spPr>
+      </p:sp>
+      <p:sp>
+        <p:nvSpPr>
+          <p:cNvPr id="19" name="Shape 17"/>
+          <p:cNvSpPr/>
+          <p:nvPr/>
+        </p:nvSpPr>
+        <p:spPr>
+          <a:xfrm>
+            <a:off x="9342831" y="91440"/>
+            <a:ext cx="27432" cy="274320"/>
+          </a:xfrm>
+          <a:prstGeom prst="rect">
+            <a:avLst/>
+          </a:prstGeom>
+          <a:solidFill>
+            <a:srgbClr val="B45309"/>
+          </a:solidFill>
+          <a:ln w="12700">
+            <a:solidFill>
+              <a:srgbClr val="B45309"/>
+            </a:solidFill>
+            <a:prstDash val="solid"/>
+          </a:ln>
+        </p:spPr>
+      </p:sp>
+      <p:pic>
+        <p:nvPicPr>
+          <p:cNvPr id="20" name="Image 0" descr="preencoded.png">    </p:cNvPr>
+          <p:cNvPicPr>
+            <a:picLocks noChangeAspect="1"/>
+          </p:cNvPicPr>
+          <p:nvPr/>
+        </p:nvPicPr>
+        <p:blipFill>
+          <a:blip r:embed="rId1"/>
+          <a:stretch>
+            <a:fillRect/>
+          </a:stretch>
+        </p:blipFill>
+        <p:spPr>
+          <a:xfrm>
+            <a:off x="9415983" y="128016"/>
+            <a:ext cx="201168" cy="201168"/>
+          </a:xfrm>
+          <a:prstGeom prst="rect">
+            <a:avLst/>
+          </a:prstGeom>
+        </p:spPr>
+      </p:pic>
+      <p:sp>
+        <p:nvSpPr>
+          <p:cNvPr id="21" name="Text 18"/>
+          <p:cNvSpPr txBox="1"/>
+          <p:nvPr/>
+        </p:nvSpPr>
+        <p:spPr>
+          <a:xfrm>
+            <a:off x="9672015" y="91440"/>
+            <a:ext cx="1934464" cy="274320"/>
+          </a:xfrm>
+          <a:prstGeom prst="rect">
+            <a:avLst/>
+          </a:prstGeom>
+          <a:noFill/>
+          <a:ln/>
+        </p:spPr>
+        <p:txBody>
+          <a:bodyPr wrap="square" lIns="0" tIns="0" rIns="0" bIns="0" rtlCol="0" anchor="ctr"/>
+          <a:lstStyle/>
+          <a:p>
+            <a:pPr indent="0" marL="0">
+              <a:buNone/>
+            </a:pPr>
+            <a:r>
+              <a:rPr lang="en-US" sz="1100" b="1" dirty="0">
+                <a:solidFill>
+                  <a:srgbClr val="92400E"/>
+                </a:solidFill>
+                <a:latin typeface="Calibri" pitchFamily="34" charset="0"/>
+                <a:ea typeface="Calibri" pitchFamily="34" charset="-122"/>
+                <a:cs typeface="Calibri" pitchFamily="34" charset="-120"/>
+              </a:rPr>
+              <a:t>USE NOW</a:t>
+            </a:r>
+            <a:pPr indent="0" marL="0">
+              <a:buNone/>
+            </a:pPr>
+            <a:r>
+              <a:rPr lang="en-US" sz="1100" dirty="0">
+                <a:solidFill>
+                  <a:srgbClr val="92400E"/>
+                </a:solidFill>
+                <a:latin typeface="Calibri" pitchFamily="34" charset="0"/>
+                <a:ea typeface="Calibri" pitchFamily="34" charset="-122"/>
+                <a:cs typeface="Calibri" pitchFamily="34" charset="-120"/>
+              </a:rPr>
+              <a:t> · the PRG32 tools</a:t>
+            </a:r>
+            <a:endParaRPr lang="en-US" sz="1100" dirty="0"/>
+          </a:p>
+        </p:txBody>
+      </p:sp>
+      <p:sp>
+        <p:nvSpPr>
           <p:cNvPr id="25" name="Slide Number Placeholder 0"/>
           <p:cNvSpPr>
             <a:spLocks noGrp="1"/>
@@ -8652,6 +10148,158 @@
               <a:t>A black screen: check the wiring of the display against the firmware</a:t>
             </a:r>
             <a:endParaRPr lang="en-US" sz="1200" dirty="0"/>
+          </a:p>
+        </p:txBody>
+      </p:sp>
+      <p:sp>
+        <p:nvSpPr>
+          <p:cNvPr id="17" name="Shape 15"/>
+          <p:cNvSpPr/>
+          <p:nvPr/>
+        </p:nvSpPr>
+        <p:spPr>
+          <a:xfrm>
+            <a:off x="9287967" y="91440"/>
+            <a:ext cx="2355088" cy="274320"/>
+          </a:xfrm>
+          <a:prstGeom prst="rect">
+            <a:avLst/>
+          </a:prstGeom>
+          <a:solidFill>
+            <a:srgbClr val="FEF3C7"/>
+          </a:solidFill>
+          <a:ln w="12700">
+            <a:solidFill>
+              <a:srgbClr val="B45309"/>
+            </a:solidFill>
+            <a:prstDash val="solid"/>
+          </a:ln>
+        </p:spPr>
+      </p:sp>
+      <p:sp>
+        <p:nvSpPr>
+          <p:cNvPr id="18" name="Shape 16"/>
+          <p:cNvSpPr/>
+          <p:nvPr/>
+        </p:nvSpPr>
+        <p:spPr>
+          <a:xfrm>
+            <a:off x="9287967" y="91440"/>
+            <a:ext cx="27432" cy="274320"/>
+          </a:xfrm>
+          <a:prstGeom prst="rect">
+            <a:avLst/>
+          </a:prstGeom>
+          <a:solidFill>
+            <a:srgbClr val="B45309"/>
+          </a:solidFill>
+          <a:ln w="12700">
+            <a:solidFill>
+              <a:srgbClr val="B45309"/>
+            </a:solidFill>
+            <a:prstDash val="solid"/>
+          </a:ln>
+        </p:spPr>
+      </p:sp>
+      <p:sp>
+        <p:nvSpPr>
+          <p:cNvPr id="19" name="Shape 17"/>
+          <p:cNvSpPr/>
+          <p:nvPr/>
+        </p:nvSpPr>
+        <p:spPr>
+          <a:xfrm>
+            <a:off x="9342831" y="91440"/>
+            <a:ext cx="27432" cy="274320"/>
+          </a:xfrm>
+          <a:prstGeom prst="rect">
+            <a:avLst/>
+          </a:prstGeom>
+          <a:solidFill>
+            <a:srgbClr val="B45309"/>
+          </a:solidFill>
+          <a:ln w="12700">
+            <a:solidFill>
+              <a:srgbClr val="B45309"/>
+            </a:solidFill>
+            <a:prstDash val="solid"/>
+          </a:ln>
+        </p:spPr>
+      </p:sp>
+      <p:pic>
+        <p:nvPicPr>
+          <p:cNvPr id="20" name="Image 0" descr="preencoded.png">    </p:cNvPr>
+          <p:cNvPicPr>
+            <a:picLocks noChangeAspect="1"/>
+          </p:cNvPicPr>
+          <p:nvPr/>
+        </p:nvPicPr>
+        <p:blipFill>
+          <a:blip r:embed="rId1"/>
+          <a:stretch>
+            <a:fillRect/>
+          </a:stretch>
+        </p:blipFill>
+        <p:spPr>
+          <a:xfrm>
+            <a:off x="9415983" y="128016"/>
+            <a:ext cx="201168" cy="201168"/>
+          </a:xfrm>
+          <a:prstGeom prst="rect">
+            <a:avLst/>
+          </a:prstGeom>
+        </p:spPr>
+      </p:pic>
+      <p:sp>
+        <p:nvSpPr>
+          <p:cNvPr id="21" name="Text 18"/>
+          <p:cNvSpPr txBox="1"/>
+          <p:nvPr/>
+        </p:nvSpPr>
+        <p:spPr>
+          <a:xfrm>
+            <a:off x="9672015" y="91440"/>
+            <a:ext cx="1934464" cy="274320"/>
+          </a:xfrm>
+          <a:prstGeom prst="rect">
+            <a:avLst/>
+          </a:prstGeom>
+          <a:noFill/>
+          <a:ln/>
+        </p:spPr>
+        <p:txBody>
+          <a:bodyPr wrap="square" lIns="0" tIns="0" rIns="0" bIns="0" rtlCol="0" anchor="ctr"/>
+          <a:lstStyle/>
+          <a:p>
+            <a:pPr indent="0" marL="0">
+              <a:buNone/>
+            </a:pPr>
+            <a:r>
+              <a:rPr lang="en-US" sz="1100" b="1" dirty="0">
+                <a:solidFill>
+                  <a:srgbClr val="92400E"/>
+                </a:solidFill>
+                <a:latin typeface="Calibri" pitchFamily="34" charset="0"/>
+                <a:ea typeface="Calibri" pitchFamily="34" charset="-122"/>
+                <a:cs typeface="Calibri" pitchFamily="34" charset="-120"/>
+              </a:rPr>
+              <a:t>USE NOW</a:t>
+            </a:r>
+            <a:pPr indent="0" marL="0">
+              <a:buNone/>
+            </a:pPr>
+            <a:r>
+              <a:rPr lang="en-US" sz="1100" dirty="0">
+                <a:solidFill>
+                  <a:srgbClr val="92400E"/>
+                </a:solidFill>
+                <a:latin typeface="Calibri" pitchFamily="34" charset="0"/>
+                <a:ea typeface="Calibri" pitchFamily="34" charset="-122"/>
+                <a:cs typeface="Calibri" pitchFamily="34" charset="-120"/>
+              </a:rPr>
+              <a:t> · the PRG32 tools</a:t>
+            </a:r>
+            <a:endParaRPr lang="en-US" sz="1100" dirty="0"/>
           </a:p>
         </p:txBody>
       </p:sp>
@@ -10038,6 +11686,158 @@
       </p:graphicFrame>
       <p:sp>
         <p:nvSpPr>
+          <p:cNvPr id="4" name="Shape 1"/>
+          <p:cNvSpPr/>
+          <p:nvPr/>
+        </p:nvSpPr>
+        <p:spPr>
+          <a:xfrm>
+            <a:off x="9287967" y="91440"/>
+            <a:ext cx="2355088" cy="274320"/>
+          </a:xfrm>
+          <a:prstGeom prst="rect">
+            <a:avLst/>
+          </a:prstGeom>
+          <a:solidFill>
+            <a:srgbClr val="FEF3C7"/>
+          </a:solidFill>
+          <a:ln w="12700">
+            <a:solidFill>
+              <a:srgbClr val="B45309"/>
+            </a:solidFill>
+            <a:prstDash val="solid"/>
+          </a:ln>
+        </p:spPr>
+      </p:sp>
+      <p:sp>
+        <p:nvSpPr>
+          <p:cNvPr id="5" name="Shape 2"/>
+          <p:cNvSpPr/>
+          <p:nvPr/>
+        </p:nvSpPr>
+        <p:spPr>
+          <a:xfrm>
+            <a:off x="9287967" y="91440"/>
+            <a:ext cx="27432" cy="274320"/>
+          </a:xfrm>
+          <a:prstGeom prst="rect">
+            <a:avLst/>
+          </a:prstGeom>
+          <a:solidFill>
+            <a:srgbClr val="B45309"/>
+          </a:solidFill>
+          <a:ln w="12700">
+            <a:solidFill>
+              <a:srgbClr val="B45309"/>
+            </a:solidFill>
+            <a:prstDash val="solid"/>
+          </a:ln>
+        </p:spPr>
+      </p:sp>
+      <p:sp>
+        <p:nvSpPr>
+          <p:cNvPr id="6" name="Shape 3"/>
+          <p:cNvSpPr/>
+          <p:nvPr/>
+        </p:nvSpPr>
+        <p:spPr>
+          <a:xfrm>
+            <a:off x="9342831" y="91440"/>
+            <a:ext cx="27432" cy="274320"/>
+          </a:xfrm>
+          <a:prstGeom prst="rect">
+            <a:avLst/>
+          </a:prstGeom>
+          <a:solidFill>
+            <a:srgbClr val="B45309"/>
+          </a:solidFill>
+          <a:ln w="12700">
+            <a:solidFill>
+              <a:srgbClr val="B45309"/>
+            </a:solidFill>
+            <a:prstDash val="solid"/>
+          </a:ln>
+        </p:spPr>
+      </p:sp>
+      <p:pic>
+        <p:nvPicPr>
+          <p:cNvPr id="7" name="Image 0" descr="preencoded.png">    </p:cNvPr>
+          <p:cNvPicPr>
+            <a:picLocks noChangeAspect="1"/>
+          </p:cNvPicPr>
+          <p:nvPr/>
+        </p:nvPicPr>
+        <p:blipFill>
+          <a:blip r:embed="rId1"/>
+          <a:stretch>
+            <a:fillRect/>
+          </a:stretch>
+        </p:blipFill>
+        <p:spPr>
+          <a:xfrm>
+            <a:off x="9415983" y="128016"/>
+            <a:ext cx="201168" cy="201168"/>
+          </a:xfrm>
+          <a:prstGeom prst="rect">
+            <a:avLst/>
+          </a:prstGeom>
+        </p:spPr>
+      </p:pic>
+      <p:sp>
+        <p:nvSpPr>
+          <p:cNvPr id="8" name="Text 4"/>
+          <p:cNvSpPr txBox="1"/>
+          <p:nvPr/>
+        </p:nvSpPr>
+        <p:spPr>
+          <a:xfrm>
+            <a:off x="9672015" y="91440"/>
+            <a:ext cx="1934464" cy="274320"/>
+          </a:xfrm>
+          <a:prstGeom prst="rect">
+            <a:avLst/>
+          </a:prstGeom>
+          <a:noFill/>
+          <a:ln/>
+        </p:spPr>
+        <p:txBody>
+          <a:bodyPr wrap="square" lIns="0" tIns="0" rIns="0" bIns="0" rtlCol="0" anchor="ctr"/>
+          <a:lstStyle/>
+          <a:p>
+            <a:pPr indent="0" marL="0">
+              <a:buNone/>
+            </a:pPr>
+            <a:r>
+              <a:rPr lang="en-US" sz="1100" b="1" dirty="0">
+                <a:solidFill>
+                  <a:srgbClr val="92400E"/>
+                </a:solidFill>
+                <a:latin typeface="Calibri" pitchFamily="34" charset="0"/>
+                <a:ea typeface="Calibri" pitchFamily="34" charset="-122"/>
+                <a:cs typeface="Calibri" pitchFamily="34" charset="-120"/>
+              </a:rPr>
+              <a:t>USE NOW</a:t>
+            </a:r>
+            <a:pPr indent="0" marL="0">
+              <a:buNone/>
+            </a:pPr>
+            <a:r>
+              <a:rPr lang="en-US" sz="1100" dirty="0">
+                <a:solidFill>
+                  <a:srgbClr val="92400E"/>
+                </a:solidFill>
+                <a:latin typeface="Calibri" pitchFamily="34" charset="0"/>
+                <a:ea typeface="Calibri" pitchFamily="34" charset="-122"/>
+                <a:cs typeface="Calibri" pitchFamily="34" charset="-120"/>
+              </a:rPr>
+              <a:t> · the PRG32 tools</a:t>
+            </a:r>
+            <a:endParaRPr lang="en-US" sz="1100" dirty="0"/>
+          </a:p>
+        </p:txBody>
+      </p:sp>
+      <p:sp>
+        <p:nvSpPr>
           <p:cNvPr id="25" name="Slide Number Placeholder 0"/>
           <p:cNvSpPr>
             <a:spLocks noGrp="1"/>
@@ -12208,6 +14008,133 @@
       </p:sp>
       <p:sp>
         <p:nvSpPr>
+          <p:cNvPr id="17" name="Shape 15"/>
+          <p:cNvSpPr/>
+          <p:nvPr/>
+        </p:nvSpPr>
+        <p:spPr>
+          <a:xfrm>
+            <a:off x="9075623" y="91440"/>
+            <a:ext cx="2567432" cy="274320"/>
+          </a:xfrm>
+          <a:prstGeom prst="rect">
+            <a:avLst/>
+          </a:prstGeom>
+          <a:solidFill>
+            <a:srgbClr val="E0F2FE"/>
+          </a:solidFill>
+          <a:ln w="12700">
+            <a:solidFill>
+              <a:srgbClr val="0369A1"/>
+            </a:solidFill>
+            <a:prstDash val="solid"/>
+          </a:ln>
+        </p:spPr>
+      </p:sp>
+      <p:sp>
+        <p:nvSpPr>
+          <p:cNvPr id="18" name="Shape 16"/>
+          <p:cNvSpPr/>
+          <p:nvPr/>
+        </p:nvSpPr>
+        <p:spPr>
+          <a:xfrm>
+            <a:off x="9075623" y="91440"/>
+            <a:ext cx="73152" cy="274320"/>
+          </a:xfrm>
+          <a:prstGeom prst="rect">
+            <a:avLst/>
+          </a:prstGeom>
+          <a:solidFill>
+            <a:srgbClr val="0369A1"/>
+          </a:solidFill>
+          <a:ln w="12700">
+            <a:solidFill>
+              <a:srgbClr val="0369A1"/>
+            </a:solidFill>
+            <a:prstDash val="solid"/>
+          </a:ln>
+        </p:spPr>
+      </p:sp>
+      <p:pic>
+        <p:nvPicPr>
+          <p:cNvPr id="19" name="Image 0" descr="preencoded.png">    </p:cNvPr>
+          <p:cNvPicPr>
+            <a:picLocks noChangeAspect="1"/>
+          </p:cNvPicPr>
+          <p:nvPr/>
+        </p:nvPicPr>
+        <p:blipFill>
+          <a:blip r:embed="rId1"/>
+          <a:stretch>
+            <a:fillRect/>
+          </a:stretch>
+        </p:blipFill>
+        <p:spPr>
+          <a:xfrm>
+            <a:off x="9203639" y="128016"/>
+            <a:ext cx="201168" cy="201168"/>
+          </a:xfrm>
+          <a:prstGeom prst="rect">
+            <a:avLst/>
+          </a:prstGeom>
+        </p:spPr>
+      </p:pic>
+      <p:sp>
+        <p:nvSpPr>
+          <p:cNvPr id="20" name="Text 17"/>
+          <p:cNvSpPr txBox="1"/>
+          <p:nvPr/>
+        </p:nvSpPr>
+        <p:spPr>
+          <a:xfrm>
+            <a:off x="9459671" y="91440"/>
+            <a:ext cx="2146808" cy="274320"/>
+          </a:xfrm>
+          <a:prstGeom prst="rect">
+            <a:avLst/>
+          </a:prstGeom>
+          <a:noFill/>
+          <a:ln/>
+        </p:spPr>
+        <p:txBody>
+          <a:bodyPr wrap="square" lIns="0" tIns="0" rIns="0" bIns="0" rtlCol="0" anchor="ctr"/>
+          <a:lstStyle/>
+          <a:p>
+            <a:pPr indent="0" marL="0">
+              <a:buNone/>
+            </a:pPr>
+            <a:r>
+              <a:rPr lang="en-US" sz="1100" b="1" dirty="0">
+                <a:solidFill>
+                  <a:srgbClr val="075985"/>
+                </a:solidFill>
+                <a:latin typeface="Calibri" pitchFamily="34" charset="0"/>
+                <a:ea typeface="Calibri" pitchFamily="34" charset="-122"/>
+                <a:cs typeface="Calibri" pitchFamily="34" charset="-120"/>
+              </a:rPr>
+              <a:t>UNDERSTAND NOW</a:t>
+            </a:r>
+            <a:pPr indent="0" marL="0">
+              <a:buNone/>
+            </a:pPr>
+            <a:r>
+              <a:rPr lang="en-US" sz="1100" dirty="0">
+                <a:solidFill>
+                  <a:srgbClr val="075985"/>
+                </a:solidFill>
+                <a:latin typeface="Calibri" pitchFamily="34" charset="0"/>
+                <a:ea typeface="Calibri" pitchFamily="34" charset="-122"/>
+                <a:cs typeface="Calibri" pitchFamily="34" charset="-120"/>
+              </a:rPr>
+              <a:t> · bit masks</a:t>
+            </a:r>
+            <a:endParaRPr lang="en-US" sz="1100" dirty="0"/>
+          </a:p>
+        </p:txBody>
+      </p:sp>
+      <p:sp>
+        <p:nvSpPr>
           <p:cNvPr id="25" name="Slide Number Placeholder 0"/>
           <p:cNvSpPr>
             <a:spLocks noGrp="1"/>
@@ -12715,6 +14642,133 @@
               <a:t>Lab 06, step 1: seven lamps, one per button bit</a:t>
             </a:r>
             <a:endParaRPr lang="en-US" sz="1200" dirty="0"/>
+          </a:p>
+        </p:txBody>
+      </p:sp>
+      <p:sp>
+        <p:nvSpPr>
+          <p:cNvPr id="15" name="Shape 12"/>
+          <p:cNvSpPr/>
+          <p:nvPr/>
+        </p:nvSpPr>
+        <p:spPr>
+          <a:xfrm>
+            <a:off x="9075623" y="91440"/>
+            <a:ext cx="2567432" cy="274320"/>
+          </a:xfrm>
+          <a:prstGeom prst="rect">
+            <a:avLst/>
+          </a:prstGeom>
+          <a:solidFill>
+            <a:srgbClr val="E0F2FE"/>
+          </a:solidFill>
+          <a:ln w="12700">
+            <a:solidFill>
+              <a:srgbClr val="0369A1"/>
+            </a:solidFill>
+            <a:prstDash val="solid"/>
+          </a:ln>
+        </p:spPr>
+      </p:sp>
+      <p:sp>
+        <p:nvSpPr>
+          <p:cNvPr id="16" name="Shape 13"/>
+          <p:cNvSpPr/>
+          <p:nvPr/>
+        </p:nvSpPr>
+        <p:spPr>
+          <a:xfrm>
+            <a:off x="9075623" y="91440"/>
+            <a:ext cx="73152" cy="274320"/>
+          </a:xfrm>
+          <a:prstGeom prst="rect">
+            <a:avLst/>
+          </a:prstGeom>
+          <a:solidFill>
+            <a:srgbClr val="0369A1"/>
+          </a:solidFill>
+          <a:ln w="12700">
+            <a:solidFill>
+              <a:srgbClr val="0369A1"/>
+            </a:solidFill>
+            <a:prstDash val="solid"/>
+          </a:ln>
+        </p:spPr>
+      </p:sp>
+      <p:pic>
+        <p:nvPicPr>
+          <p:cNvPr id="17" name="Image 1" descr="preencoded.png">    </p:cNvPr>
+          <p:cNvPicPr>
+            <a:picLocks noChangeAspect="1"/>
+          </p:cNvPicPr>
+          <p:nvPr/>
+        </p:nvPicPr>
+        <p:blipFill>
+          <a:blip r:embed="rId2"/>
+          <a:stretch>
+            <a:fillRect/>
+          </a:stretch>
+        </p:blipFill>
+        <p:spPr>
+          <a:xfrm>
+            <a:off x="9203639" y="128016"/>
+            <a:ext cx="201168" cy="201168"/>
+          </a:xfrm>
+          <a:prstGeom prst="rect">
+            <a:avLst/>
+          </a:prstGeom>
+        </p:spPr>
+      </p:pic>
+      <p:sp>
+        <p:nvSpPr>
+          <p:cNvPr id="18" name="Text 14"/>
+          <p:cNvSpPr txBox="1"/>
+          <p:nvPr/>
+        </p:nvSpPr>
+        <p:spPr>
+          <a:xfrm>
+            <a:off x="9459671" y="91440"/>
+            <a:ext cx="2146808" cy="274320"/>
+          </a:xfrm>
+          <a:prstGeom prst="rect">
+            <a:avLst/>
+          </a:prstGeom>
+          <a:noFill/>
+          <a:ln/>
+        </p:spPr>
+        <p:txBody>
+          <a:bodyPr wrap="square" lIns="0" tIns="0" rIns="0" bIns="0" rtlCol="0" anchor="ctr"/>
+          <a:lstStyle/>
+          <a:p>
+            <a:pPr indent="0" marL="0">
+              <a:buNone/>
+            </a:pPr>
+            <a:r>
+              <a:rPr lang="en-US" sz="1100" b="1" dirty="0">
+                <a:solidFill>
+                  <a:srgbClr val="075985"/>
+                </a:solidFill>
+                <a:latin typeface="Calibri" pitchFamily="34" charset="0"/>
+                <a:ea typeface="Calibri" pitchFamily="34" charset="-122"/>
+                <a:cs typeface="Calibri" pitchFamily="34" charset="-120"/>
+              </a:rPr>
+              <a:t>UNDERSTAND NOW</a:t>
+            </a:r>
+            <a:pPr indent="0" marL="0">
+              <a:buNone/>
+            </a:pPr>
+            <a:r>
+              <a:rPr lang="en-US" sz="1100" dirty="0">
+                <a:solidFill>
+                  <a:srgbClr val="075985"/>
+                </a:solidFill>
+                <a:latin typeface="Calibri" pitchFamily="34" charset="0"/>
+                <a:ea typeface="Calibri" pitchFamily="34" charset="-122"/>
+                <a:cs typeface="Calibri" pitchFamily="34" charset="-120"/>
+              </a:rPr>
+              <a:t> · bit masks</a:t>
+            </a:r>
+            <a:endParaRPr lang="en-US" sz="1100" dirty="0"/>
           </a:p>
         </p:txBody>
       </p:sp>
@@ -14275,6 +16329,133 @@
       </p:sp>
       <p:sp>
         <p:nvSpPr>
+          <p:cNvPr id="5" name="Shape 2"/>
+          <p:cNvSpPr/>
+          <p:nvPr/>
+        </p:nvSpPr>
+        <p:spPr>
+          <a:xfrm>
+            <a:off x="9075623" y="91440"/>
+            <a:ext cx="2567432" cy="274320"/>
+          </a:xfrm>
+          <a:prstGeom prst="rect">
+            <a:avLst/>
+          </a:prstGeom>
+          <a:solidFill>
+            <a:srgbClr val="E0F2FE"/>
+          </a:solidFill>
+          <a:ln w="12700">
+            <a:solidFill>
+              <a:srgbClr val="0369A1"/>
+            </a:solidFill>
+            <a:prstDash val="solid"/>
+          </a:ln>
+        </p:spPr>
+      </p:sp>
+      <p:sp>
+        <p:nvSpPr>
+          <p:cNvPr id="6" name="Shape 3"/>
+          <p:cNvSpPr/>
+          <p:nvPr/>
+        </p:nvSpPr>
+        <p:spPr>
+          <a:xfrm>
+            <a:off x="9075623" y="91440"/>
+            <a:ext cx="73152" cy="274320"/>
+          </a:xfrm>
+          <a:prstGeom prst="rect">
+            <a:avLst/>
+          </a:prstGeom>
+          <a:solidFill>
+            <a:srgbClr val="0369A1"/>
+          </a:solidFill>
+          <a:ln w="12700">
+            <a:solidFill>
+              <a:srgbClr val="0369A1"/>
+            </a:solidFill>
+            <a:prstDash val="solid"/>
+          </a:ln>
+        </p:spPr>
+      </p:sp>
+      <p:pic>
+        <p:nvPicPr>
+          <p:cNvPr id="7" name="Image 0" descr="preencoded.png">    </p:cNvPr>
+          <p:cNvPicPr>
+            <a:picLocks noChangeAspect="1"/>
+          </p:cNvPicPr>
+          <p:nvPr/>
+        </p:nvPicPr>
+        <p:blipFill>
+          <a:blip r:embed="rId1"/>
+          <a:stretch>
+            <a:fillRect/>
+          </a:stretch>
+        </p:blipFill>
+        <p:spPr>
+          <a:xfrm>
+            <a:off x="9203639" y="128016"/>
+            <a:ext cx="201168" cy="201168"/>
+          </a:xfrm>
+          <a:prstGeom prst="rect">
+            <a:avLst/>
+          </a:prstGeom>
+        </p:spPr>
+      </p:pic>
+      <p:sp>
+        <p:nvSpPr>
+          <p:cNvPr id="8" name="Text 4"/>
+          <p:cNvSpPr txBox="1"/>
+          <p:nvPr/>
+        </p:nvSpPr>
+        <p:spPr>
+          <a:xfrm>
+            <a:off x="9459671" y="91440"/>
+            <a:ext cx="2146808" cy="274320"/>
+          </a:xfrm>
+          <a:prstGeom prst="rect">
+            <a:avLst/>
+          </a:prstGeom>
+          <a:noFill/>
+          <a:ln/>
+        </p:spPr>
+        <p:txBody>
+          <a:bodyPr wrap="square" lIns="0" tIns="0" rIns="0" bIns="0" rtlCol="0" anchor="ctr"/>
+          <a:lstStyle/>
+          <a:p>
+            <a:pPr indent="0" marL="0">
+              <a:buNone/>
+            </a:pPr>
+            <a:r>
+              <a:rPr lang="en-US" sz="1100" b="1" dirty="0">
+                <a:solidFill>
+                  <a:srgbClr val="075985"/>
+                </a:solidFill>
+                <a:latin typeface="Calibri" pitchFamily="34" charset="0"/>
+                <a:ea typeface="Calibri" pitchFamily="34" charset="-122"/>
+                <a:cs typeface="Calibri" pitchFamily="34" charset="-120"/>
+              </a:rPr>
+              <a:t>UNDERSTAND NOW</a:t>
+            </a:r>
+            <a:pPr indent="0" marL="0">
+              <a:buNone/>
+            </a:pPr>
+            <a:r>
+              <a:rPr lang="en-US" sz="1100" dirty="0">
+                <a:solidFill>
+                  <a:srgbClr val="075985"/>
+                </a:solidFill>
+                <a:latin typeface="Calibri" pitchFamily="34" charset="0"/>
+                <a:ea typeface="Calibri" pitchFamily="34" charset="-122"/>
+                <a:cs typeface="Calibri" pitchFamily="34" charset="-120"/>
+              </a:rPr>
+              <a:t> · bit masks</a:t>
+            </a:r>
+            <a:endParaRPr lang="en-US" sz="1100" dirty="0"/>
+          </a:p>
+        </p:txBody>
+      </p:sp>
+      <p:sp>
+        <p:nvSpPr>
           <p:cNvPr id="25" name="Slide Number Placeholder 0"/>
           <p:cNvSpPr>
             <a:spLocks noGrp="1"/>
@@ -15791,6 +17972,133 @@
       </p:graphicFrame>
       <p:sp>
         <p:nvSpPr>
+          <p:cNvPr id="4" name="Shape 1"/>
+          <p:cNvSpPr/>
+          <p:nvPr/>
+        </p:nvSpPr>
+        <p:spPr>
+          <a:xfrm>
+            <a:off x="9075623" y="91440"/>
+            <a:ext cx="2567432" cy="274320"/>
+          </a:xfrm>
+          <a:prstGeom prst="rect">
+            <a:avLst/>
+          </a:prstGeom>
+          <a:solidFill>
+            <a:srgbClr val="E0F2FE"/>
+          </a:solidFill>
+          <a:ln w="12700">
+            <a:solidFill>
+              <a:srgbClr val="0369A1"/>
+            </a:solidFill>
+            <a:prstDash val="solid"/>
+          </a:ln>
+        </p:spPr>
+      </p:sp>
+      <p:sp>
+        <p:nvSpPr>
+          <p:cNvPr id="5" name="Shape 2"/>
+          <p:cNvSpPr/>
+          <p:nvPr/>
+        </p:nvSpPr>
+        <p:spPr>
+          <a:xfrm>
+            <a:off x="9075623" y="91440"/>
+            <a:ext cx="73152" cy="274320"/>
+          </a:xfrm>
+          <a:prstGeom prst="rect">
+            <a:avLst/>
+          </a:prstGeom>
+          <a:solidFill>
+            <a:srgbClr val="0369A1"/>
+          </a:solidFill>
+          <a:ln w="12700">
+            <a:solidFill>
+              <a:srgbClr val="0369A1"/>
+            </a:solidFill>
+            <a:prstDash val="solid"/>
+          </a:ln>
+        </p:spPr>
+      </p:sp>
+      <p:pic>
+        <p:nvPicPr>
+          <p:cNvPr id="6" name="Image 0" descr="preencoded.png">    </p:cNvPr>
+          <p:cNvPicPr>
+            <a:picLocks noChangeAspect="1"/>
+          </p:cNvPicPr>
+          <p:nvPr/>
+        </p:nvPicPr>
+        <p:blipFill>
+          <a:blip r:embed="rId1"/>
+          <a:stretch>
+            <a:fillRect/>
+          </a:stretch>
+        </p:blipFill>
+        <p:spPr>
+          <a:xfrm>
+            <a:off x="9203639" y="128016"/>
+            <a:ext cx="201168" cy="201168"/>
+          </a:xfrm>
+          <a:prstGeom prst="rect">
+            <a:avLst/>
+          </a:prstGeom>
+        </p:spPr>
+      </p:pic>
+      <p:sp>
+        <p:nvSpPr>
+          <p:cNvPr id="7" name="Text 3"/>
+          <p:cNvSpPr txBox="1"/>
+          <p:nvPr/>
+        </p:nvSpPr>
+        <p:spPr>
+          <a:xfrm>
+            <a:off x="9459671" y="91440"/>
+            <a:ext cx="2146808" cy="274320"/>
+          </a:xfrm>
+          <a:prstGeom prst="rect">
+            <a:avLst/>
+          </a:prstGeom>
+          <a:noFill/>
+          <a:ln/>
+        </p:spPr>
+        <p:txBody>
+          <a:bodyPr wrap="square" lIns="0" tIns="0" rIns="0" bIns="0" rtlCol="0" anchor="ctr"/>
+          <a:lstStyle/>
+          <a:p>
+            <a:pPr indent="0" marL="0">
+              <a:buNone/>
+            </a:pPr>
+            <a:r>
+              <a:rPr lang="en-US" sz="1100" b="1" dirty="0">
+                <a:solidFill>
+                  <a:srgbClr val="075985"/>
+                </a:solidFill>
+                <a:latin typeface="Calibri" pitchFamily="34" charset="0"/>
+                <a:ea typeface="Calibri" pitchFamily="34" charset="-122"/>
+                <a:cs typeface="Calibri" pitchFamily="34" charset="-120"/>
+              </a:rPr>
+              <a:t>UNDERSTAND NOW</a:t>
+            </a:r>
+            <a:pPr indent="0" marL="0">
+              <a:buNone/>
+            </a:pPr>
+            <a:r>
+              <a:rPr lang="en-US" sz="1100" dirty="0">
+                <a:solidFill>
+                  <a:srgbClr val="075985"/>
+                </a:solidFill>
+                <a:latin typeface="Calibri" pitchFamily="34" charset="0"/>
+                <a:ea typeface="Calibri" pitchFamily="34" charset="-122"/>
+                <a:cs typeface="Calibri" pitchFamily="34" charset="-120"/>
+              </a:rPr>
+              <a:t> · bit masks</a:t>
+            </a:r>
+            <a:endParaRPr lang="en-US" sz="1100" dirty="0"/>
+          </a:p>
+        </p:txBody>
+      </p:sp>
+      <p:sp>
+        <p:nvSpPr>
           <p:cNvPr id="25" name="Slide Number Placeholder 0"/>
           <p:cNvSpPr>
             <a:spLocks noGrp="1"/>
@@ -16646,6 +18954,133 @@
       </p:sp>
       <p:sp>
         <p:nvSpPr>
+          <p:cNvPr id="17" name="Shape 15"/>
+          <p:cNvSpPr/>
+          <p:nvPr/>
+        </p:nvSpPr>
+        <p:spPr>
+          <a:xfrm>
+            <a:off x="9075623" y="91440"/>
+            <a:ext cx="2567432" cy="274320"/>
+          </a:xfrm>
+          <a:prstGeom prst="rect">
+            <a:avLst/>
+          </a:prstGeom>
+          <a:solidFill>
+            <a:srgbClr val="E0F2FE"/>
+          </a:solidFill>
+          <a:ln w="12700">
+            <a:solidFill>
+              <a:srgbClr val="0369A1"/>
+            </a:solidFill>
+            <a:prstDash val="solid"/>
+          </a:ln>
+        </p:spPr>
+      </p:sp>
+      <p:sp>
+        <p:nvSpPr>
+          <p:cNvPr id="18" name="Shape 16"/>
+          <p:cNvSpPr/>
+          <p:nvPr/>
+        </p:nvSpPr>
+        <p:spPr>
+          <a:xfrm>
+            <a:off x="9075623" y="91440"/>
+            <a:ext cx="73152" cy="274320"/>
+          </a:xfrm>
+          <a:prstGeom prst="rect">
+            <a:avLst/>
+          </a:prstGeom>
+          <a:solidFill>
+            <a:srgbClr val="0369A1"/>
+          </a:solidFill>
+          <a:ln w="12700">
+            <a:solidFill>
+              <a:srgbClr val="0369A1"/>
+            </a:solidFill>
+            <a:prstDash val="solid"/>
+          </a:ln>
+        </p:spPr>
+      </p:sp>
+      <p:pic>
+        <p:nvPicPr>
+          <p:cNvPr id="19" name="Image 0" descr="preencoded.png">    </p:cNvPr>
+          <p:cNvPicPr>
+            <a:picLocks noChangeAspect="1"/>
+          </p:cNvPicPr>
+          <p:nvPr/>
+        </p:nvPicPr>
+        <p:blipFill>
+          <a:blip r:embed="rId1"/>
+          <a:stretch>
+            <a:fillRect/>
+          </a:stretch>
+        </p:blipFill>
+        <p:spPr>
+          <a:xfrm>
+            <a:off x="9203639" y="128016"/>
+            <a:ext cx="201168" cy="201168"/>
+          </a:xfrm>
+          <a:prstGeom prst="rect">
+            <a:avLst/>
+          </a:prstGeom>
+        </p:spPr>
+      </p:pic>
+      <p:sp>
+        <p:nvSpPr>
+          <p:cNvPr id="20" name="Text 17"/>
+          <p:cNvSpPr txBox="1"/>
+          <p:nvPr/>
+        </p:nvSpPr>
+        <p:spPr>
+          <a:xfrm>
+            <a:off x="9459671" y="91440"/>
+            <a:ext cx="2146808" cy="274320"/>
+          </a:xfrm>
+          <a:prstGeom prst="rect">
+            <a:avLst/>
+          </a:prstGeom>
+          <a:noFill/>
+          <a:ln/>
+        </p:spPr>
+        <p:txBody>
+          <a:bodyPr wrap="square" lIns="0" tIns="0" rIns="0" bIns="0" rtlCol="0" anchor="ctr"/>
+          <a:lstStyle/>
+          <a:p>
+            <a:pPr indent="0" marL="0">
+              <a:buNone/>
+            </a:pPr>
+            <a:r>
+              <a:rPr lang="en-US" sz="1100" b="1" dirty="0">
+                <a:solidFill>
+                  <a:srgbClr val="075985"/>
+                </a:solidFill>
+                <a:latin typeface="Calibri" pitchFamily="34" charset="0"/>
+                <a:ea typeface="Calibri" pitchFamily="34" charset="-122"/>
+                <a:cs typeface="Calibri" pitchFamily="34" charset="-120"/>
+              </a:rPr>
+              <a:t>UNDERSTAND NOW</a:t>
+            </a:r>
+            <a:pPr indent="0" marL="0">
+              <a:buNone/>
+            </a:pPr>
+            <a:r>
+              <a:rPr lang="en-US" sz="1100" dirty="0">
+                <a:solidFill>
+                  <a:srgbClr val="075985"/>
+                </a:solidFill>
+                <a:latin typeface="Calibri" pitchFamily="34" charset="0"/>
+                <a:ea typeface="Calibri" pitchFamily="34" charset="-122"/>
+                <a:cs typeface="Calibri" pitchFamily="34" charset="-120"/>
+              </a:rPr>
+              <a:t> · bit masks</a:t>
+            </a:r>
+            <a:endParaRPr lang="en-US" sz="1100" dirty="0"/>
+          </a:p>
+        </p:txBody>
+      </p:sp>
+      <p:sp>
+        <p:nvSpPr>
           <p:cNvPr id="25" name="Slide Number Placeholder 0"/>
           <p:cNvSpPr>
             <a:spLocks noGrp="1"/>
@@ -17202,6 +19637,133 @@
       </p:sp>
       <p:sp>
         <p:nvSpPr>
+          <p:cNvPr id="10" name="Shape 7"/>
+          <p:cNvSpPr/>
+          <p:nvPr/>
+        </p:nvSpPr>
+        <p:spPr>
+          <a:xfrm>
+            <a:off x="9075623" y="91440"/>
+            <a:ext cx="2567432" cy="274320"/>
+          </a:xfrm>
+          <a:prstGeom prst="rect">
+            <a:avLst/>
+          </a:prstGeom>
+          <a:solidFill>
+            <a:srgbClr val="E0F2FE"/>
+          </a:solidFill>
+          <a:ln w="12700">
+            <a:solidFill>
+              <a:srgbClr val="0369A1"/>
+            </a:solidFill>
+            <a:prstDash val="solid"/>
+          </a:ln>
+        </p:spPr>
+      </p:sp>
+      <p:sp>
+        <p:nvSpPr>
+          <p:cNvPr id="11" name="Shape 8"/>
+          <p:cNvSpPr/>
+          <p:nvPr/>
+        </p:nvSpPr>
+        <p:spPr>
+          <a:xfrm>
+            <a:off x="9075623" y="91440"/>
+            <a:ext cx="73152" cy="274320"/>
+          </a:xfrm>
+          <a:prstGeom prst="rect">
+            <a:avLst/>
+          </a:prstGeom>
+          <a:solidFill>
+            <a:srgbClr val="0369A1"/>
+          </a:solidFill>
+          <a:ln w="12700">
+            <a:solidFill>
+              <a:srgbClr val="0369A1"/>
+            </a:solidFill>
+            <a:prstDash val="solid"/>
+          </a:ln>
+        </p:spPr>
+      </p:sp>
+      <p:pic>
+        <p:nvPicPr>
+          <p:cNvPr id="12" name="Image 1" descr="preencoded.png">    </p:cNvPr>
+          <p:cNvPicPr>
+            <a:picLocks noChangeAspect="1"/>
+          </p:cNvPicPr>
+          <p:nvPr/>
+        </p:nvPicPr>
+        <p:blipFill>
+          <a:blip r:embed="rId2"/>
+          <a:stretch>
+            <a:fillRect/>
+          </a:stretch>
+        </p:blipFill>
+        <p:spPr>
+          <a:xfrm>
+            <a:off x="9203639" y="128016"/>
+            <a:ext cx="201168" cy="201168"/>
+          </a:xfrm>
+          <a:prstGeom prst="rect">
+            <a:avLst/>
+          </a:prstGeom>
+        </p:spPr>
+      </p:pic>
+      <p:sp>
+        <p:nvSpPr>
+          <p:cNvPr id="13" name="Text 9"/>
+          <p:cNvSpPr txBox="1"/>
+          <p:nvPr/>
+        </p:nvSpPr>
+        <p:spPr>
+          <a:xfrm>
+            <a:off x="9459671" y="91440"/>
+            <a:ext cx="2146808" cy="274320"/>
+          </a:xfrm>
+          <a:prstGeom prst="rect">
+            <a:avLst/>
+          </a:prstGeom>
+          <a:noFill/>
+          <a:ln/>
+        </p:spPr>
+        <p:txBody>
+          <a:bodyPr wrap="square" lIns="0" tIns="0" rIns="0" bIns="0" rtlCol="0" anchor="ctr"/>
+          <a:lstStyle/>
+          <a:p>
+            <a:pPr indent="0" marL="0">
+              <a:buNone/>
+            </a:pPr>
+            <a:r>
+              <a:rPr lang="en-US" sz="1100" b="1" dirty="0">
+                <a:solidFill>
+                  <a:srgbClr val="075985"/>
+                </a:solidFill>
+                <a:latin typeface="Calibri" pitchFamily="34" charset="0"/>
+                <a:ea typeface="Calibri" pitchFamily="34" charset="-122"/>
+                <a:cs typeface="Calibri" pitchFamily="34" charset="-120"/>
+              </a:rPr>
+              <a:t>UNDERSTAND NOW</a:t>
+            </a:r>
+            <a:pPr indent="0" marL="0">
+              <a:buNone/>
+            </a:pPr>
+            <a:r>
+              <a:rPr lang="en-US" sz="1100" dirty="0">
+                <a:solidFill>
+                  <a:srgbClr val="075985"/>
+                </a:solidFill>
+                <a:latin typeface="Calibri" pitchFamily="34" charset="0"/>
+                <a:ea typeface="Calibri" pitchFamily="34" charset="-122"/>
+                <a:cs typeface="Calibri" pitchFamily="34" charset="-120"/>
+              </a:rPr>
+              <a:t> · bit masks</a:t>
+            </a:r>
+            <a:endParaRPr lang="en-US" sz="1100" dirty="0"/>
+          </a:p>
+        </p:txBody>
+      </p:sp>
+      <p:sp>
+        <p:nvSpPr>
           <p:cNvPr id="25" name="Slide Number Placeholder 0"/>
           <p:cNvSpPr>
             <a:spLocks noGrp="1"/>
@@ -17717,6 +20279,158 @@
               <a:t>.global l08_draw</a:t>
             </a:r>
             <a:endParaRPr lang="en-US" sz="1350" dirty="0"/>
+          </a:p>
+        </p:txBody>
+      </p:sp>
+      <p:sp>
+        <p:nvSpPr>
+          <p:cNvPr id="5" name="Shape 3"/>
+          <p:cNvSpPr/>
+          <p:nvPr/>
+        </p:nvSpPr>
+        <p:spPr>
+          <a:xfrm>
+            <a:off x="8959672" y="91440"/>
+            <a:ext cx="2683383" cy="274320"/>
+          </a:xfrm>
+          <a:prstGeom prst="rect">
+            <a:avLst/>
+          </a:prstGeom>
+          <a:solidFill>
+            <a:srgbClr val="FEF3C7"/>
+          </a:solidFill>
+          <a:ln w="12700">
+            <a:solidFill>
+              <a:srgbClr val="B45309"/>
+            </a:solidFill>
+            <a:prstDash val="solid"/>
+          </a:ln>
+        </p:spPr>
+      </p:sp>
+      <p:sp>
+        <p:nvSpPr>
+          <p:cNvPr id="6" name="Shape 4"/>
+          <p:cNvSpPr/>
+          <p:nvPr/>
+        </p:nvSpPr>
+        <p:spPr>
+          <a:xfrm>
+            <a:off x="8959672" y="91440"/>
+            <a:ext cx="27432" cy="274320"/>
+          </a:xfrm>
+          <a:prstGeom prst="rect">
+            <a:avLst/>
+          </a:prstGeom>
+          <a:solidFill>
+            <a:srgbClr val="B45309"/>
+          </a:solidFill>
+          <a:ln w="12700">
+            <a:solidFill>
+              <a:srgbClr val="B45309"/>
+            </a:solidFill>
+            <a:prstDash val="solid"/>
+          </a:ln>
+        </p:spPr>
+      </p:sp>
+      <p:sp>
+        <p:nvSpPr>
+          <p:cNvPr id="7" name="Shape 5"/>
+          <p:cNvSpPr/>
+          <p:nvPr/>
+        </p:nvSpPr>
+        <p:spPr>
+          <a:xfrm>
+            <a:off x="9014536" y="91440"/>
+            <a:ext cx="27432" cy="274320"/>
+          </a:xfrm>
+          <a:prstGeom prst="rect">
+            <a:avLst/>
+          </a:prstGeom>
+          <a:solidFill>
+            <a:srgbClr val="B45309"/>
+          </a:solidFill>
+          <a:ln w="12700">
+            <a:solidFill>
+              <a:srgbClr val="B45309"/>
+            </a:solidFill>
+            <a:prstDash val="solid"/>
+          </a:ln>
+        </p:spPr>
+      </p:sp>
+      <p:pic>
+        <p:nvPicPr>
+          <p:cNvPr id="8" name="Image 0" descr="preencoded.png">    </p:cNvPr>
+          <p:cNvPicPr>
+            <a:picLocks noChangeAspect="1"/>
+          </p:cNvPicPr>
+          <p:nvPr/>
+        </p:nvPicPr>
+        <p:blipFill>
+          <a:blip r:embed="rId1"/>
+          <a:stretch>
+            <a:fillRect/>
+          </a:stretch>
+        </p:blipFill>
+        <p:spPr>
+          <a:xfrm>
+            <a:off x="9087688" y="128016"/>
+            <a:ext cx="201168" cy="201168"/>
+          </a:xfrm>
+          <a:prstGeom prst="rect">
+            <a:avLst/>
+          </a:prstGeom>
+        </p:spPr>
+      </p:pic>
+      <p:sp>
+        <p:nvSpPr>
+          <p:cNvPr id="9" name="Text 6"/>
+          <p:cNvSpPr txBox="1"/>
+          <p:nvPr/>
+        </p:nvSpPr>
+        <p:spPr>
+          <a:xfrm>
+            <a:off x="9343720" y="91440"/>
+            <a:ext cx="2262759" cy="274320"/>
+          </a:xfrm>
+          <a:prstGeom prst="rect">
+            <a:avLst/>
+          </a:prstGeom>
+          <a:noFill/>
+          <a:ln/>
+        </p:spPr>
+        <p:txBody>
+          <a:bodyPr wrap="square" lIns="0" tIns="0" rIns="0" bIns="0" rtlCol="0" anchor="ctr"/>
+          <a:lstStyle/>
+          <a:p>
+            <a:pPr indent="0" marL="0">
+              <a:buNone/>
+            </a:pPr>
+            <a:r>
+              <a:rPr lang="en-US" sz="1100" b="1" dirty="0">
+                <a:solidFill>
+                  <a:srgbClr val="92400E"/>
+                </a:solidFill>
+                <a:latin typeface="Calibri" pitchFamily="34" charset="0"/>
+                <a:ea typeface="Calibri" pitchFamily="34" charset="-122"/>
+                <a:cs typeface="Calibri" pitchFamily="34" charset="-120"/>
+              </a:rPr>
+              <a:t>USE NOW</a:t>
+            </a:r>
+            <a:pPr indent="0" marL="0">
+              <a:buNone/>
+            </a:pPr>
+            <a:r>
+              <a:rPr lang="en-US" sz="1100" dirty="0">
+                <a:solidFill>
+                  <a:srgbClr val="92400E"/>
+                </a:solidFill>
+                <a:latin typeface="Calibri" pitchFamily="34" charset="0"/>
+                <a:ea typeface="Calibri" pitchFamily="34" charset="-122"/>
+                <a:cs typeface="Calibri" pitchFamily="34" charset="-120"/>
+              </a:rPr>
+              <a:t> · the complete program</a:t>
+            </a:r>
+            <a:endParaRPr lang="en-US" sz="1100" dirty="0"/>
           </a:p>
         </p:txBody>
       </p:sp>

--- a/en/slides/08-Computer_Architecture-Boolean_Algebra_1-Code.pptx
+++ b/en/slides/08-Computer_Architecture-Boolean_Algebra_1-Code.pptx
@@ -126,19 +126,19 @@
   <p:extLst>
     <p:ext uri="{521415D9-36F7-43E2-AB2F-B90AF26B5E84}">
       <p14:sectionLst xmlns:p14="http://schemas.microsoft.com/office/powerpoint/2010/main">
-        <p14:section name="Opening" id="{c2ce9b12-51e6-e9d6-1add-9ec4aa59c290}">
+        <p14:section name="Opening" id="{25314065-90c0-029d-ca24-63cb037aad18}">
           <p14:sldIdLst>
             <p14:sldId id="256"/>
             <p14:sldId id="257"/>
           </p14:sldIdLst>
         </p14:section>
-        <p14:section name="Warm-up on the machine" id="{aae67c7f-d8ab-dcd5-3db9-6e0c6cfa0018}">
+        <p14:section name="Warm-up on the machine" id="{6b51dfd5-0ed0-3021-1386-a710addbaae7}">
           <p14:sldIdLst>
             <p14:sldId id="258"/>
             <p14:sldId id="259"/>
           </p14:sldIdLst>
         </p14:section>
-        <p14:section name="Back to the machine" id="{5bf92807-e7f0-0918-3a5f-7e920e0994a6}">
+        <p14:section name="Back to the machine" id="{87f198be-2274-107c-df07-8102db81d15e}">
           <p14:sldIdLst>
             <p14:sldId id="260"/>
             <p14:sldId id="261"/>
@@ -146,7 +146,7 @@
             <p14:sldId id="263"/>
           </p14:sldIdLst>
         </p14:section>
-        <p14:section name="The complete program" id="{06cce775-9674-bf1d-e9cd-bddefb46d3e1}">
+        <p14:section name="The complete program" id="{bc28a605-1504-5e2e-a034-99b227872d2b}">
           <p14:sldIdLst>
             <p14:sldId id="264"/>
             <p14:sldId id="265"/>
@@ -156,7 +156,7 @@
             <p14:sldId id="269"/>
           </p14:sldIdLst>
         </p14:section>
-        <p14:section name="Run it and test it" id="{ffc048a3-154a-46d4-8a36-71e65218432d}">
+        <p14:section name="Run it and test it" id="{2710d57c-b717-3d06-c815-bf94640a725a}">
           <p14:sldIdLst>
             <p14:sldId id="270"/>
             <p14:sldId id="271"/>
@@ -165,7 +165,7 @@
             <p14:sldId id="274"/>
           </p14:sldIdLst>
         </p14:section>
-        <p14:section name="Exercises" id="{1f70bba9-9cc7-a9f0-df6a-b009b62ae31b}">
+        <p14:section name="Exercises" id="{c9c71714-acde-de99-8124-3164e52ed69f}">
           <p14:sldIdLst>
             <p14:sldId id="275"/>
           </p14:sldIdLst>
